--- a/Topic_A/Exam_Practice/AT-A-L07_Speaking_Workshop_Body_Parts_and_Health_Problems.pptx
+++ b/Topic_A/Exam_Practice/AT-A-L07_Speaking_Workshop_Body_Parts_and_Health_Problems.pptx
@@ -523,7 +523,11 @@
           <a:lstStyle/>
           <a:p>
             <a:r>
-              <a:rPr lang="en-US" dirty="0"/>
+              <a:rPr lang="ar-SA" dirty="0">
+                <a:latin typeface="Amiri" pitchFamily="2" charset="-78"/>
+                <a:ea typeface="Amiri" pitchFamily="2" charset="-78"/>
+                <a:cs typeface="Amiri" pitchFamily="2" charset="-78"/>
+              </a:rPr>
               <a:t>WORKSHOP AT A GLANCE — 60 minutes on Teams, mostly in breakout rooms of three.
 0–2 Welcome · 2–6 How Paper 3 works · 6–10 Language bank · 10–13 Breakout routine · 13–33 Role plays A–D in rooms (rotate roles) · 33–37 Role-play models (main room) · 37–50 Topic conversation in rooms · 50–55 Conversation models · 55–58 Feedback + self-check · 58–60 Close.
 Content: teacher-made exam scenarios for Advanced Topic A, Lesson 7 (Body Parts and Health Problems, AT-A-L07), using that lesson’s language (possessive suffixes; عِنْدِي; symptoms and duration (مُنْذُ)). Every task has Core · Develop · Stretch support and a model answer.
@@ -615,7 +619,11 @@
           <a:lstStyle/>
           <a:p>
             <a:r>
-              <a:rPr lang="en-US" dirty="0"/>
+              <a:rPr lang="ar-SA" dirty="0">
+                <a:latin typeface="Amiri" pitchFamily="2" charset="-78"/>
+                <a:ea typeface="Amiri" pitchFamily="2" charset="-78"/>
+                <a:cs typeface="Amiri" pitchFamily="2" charset="-78"/>
+              </a:rPr>
               <a:t>ROLE PLAY C (Develop) — phoning a friend.
 SET-UP IN THE BREAKOUT ROOM: A = examiner (reads the left column ONLY — the questions, in order), B = candidate (sees the task column; Core may use the help column), C = observer (ticks the feedback checklist). 1 minute preparation, about 3 minutes speaking, 1 minute feedback, then rotate.
 Task ! is the unexpected question: in the exam the candidate has not seen it — the examiner should read it without warning.
@@ -707,7 +715,11 @@
           <a:lstStyle/>
           <a:p>
             <a:r>
-              <a:rPr lang="en-US" dirty="0"/>
+              <a:rPr lang="ar-SA" dirty="0">
+                <a:latin typeface="Amiri" pitchFamily="2" charset="-78"/>
+                <a:ea typeface="Amiri" pitchFamily="2" charset="-78"/>
+                <a:cs typeface="Amiri" pitchFamily="2" charset="-78"/>
+              </a:rPr>
               <a:t>ROLE PLAY D (Stretch) — at the clinic.
 SET-UP IN THE BREAKOUT ROOM: A = examiner (reads the left column ONLY — the questions, in order), B = candidate (sees the task column; Core may use the help column), C = observer (ticks the feedback checklist). 1 minute preparation, about 3 minutes speaking, 1 minute feedback, then rotate.
 Task ! is the unexpected question: in the exam the candidate has not seen it — the examiner should read it without warning.
@@ -1243,7 +1255,11 @@
           <a:lstStyle/>
           <a:p>
             <a:r>
-              <a:rPr lang="en-US" dirty="0"/>
+              <a:rPr lang="ar-SA" dirty="0">
+                <a:latin typeface="Amiri" pitchFamily="2" charset="-78"/>
+                <a:ea typeface="Amiri" pitchFamily="2" charset="-78"/>
+                <a:cs typeface="Amiri" pitchFamily="2" charset="-78"/>
+              </a:rPr>
               <a:t>TOPIC CONVERSATION — Core. Examiner asks the questions in order and may add “لِمَاذَا؟ / هَلْ يُمْكِنُ أَنْ تَشْرَحَ أَكْثَرَ؟” to push for more. Candidate aims for one full sentence per question.
 </a:t>
             </a:r>
@@ -1332,7 +1348,11 @@
           <a:lstStyle/>
           <a:p>
             <a:r>
-              <a:rPr lang="en-US" dirty="0"/>
+              <a:rPr lang="ar-SA" dirty="0">
+                <a:latin typeface="Amiri" pitchFamily="2" charset="-78"/>
+                <a:ea typeface="Amiri" pitchFamily="2" charset="-78"/>
+                <a:cs typeface="Amiri" pitchFamily="2" charset="-78"/>
+              </a:rPr>
               <a:t>TOPIC CONVERSATION — Develop. Examiner asks the questions in order and may add “لِمَاذَا؟ / هَلْ يُمْكِنُ أَنْ تَشْرَحَ أَكْثَرَ؟” to push for more. Candidate aims for two or three sentences, with a past narrative and a duration.
 </a:t>
             </a:r>
@@ -1421,7 +1441,11 @@
           <a:lstStyle/>
           <a:p>
             <a:r>
-              <a:rPr lang="en-US" dirty="0"/>
+              <a:rPr lang="ar-SA" dirty="0">
+                <a:latin typeface="Amiri" pitchFamily="2" charset="-78"/>
+                <a:ea typeface="Amiri" pitchFamily="2" charset="-78"/>
+                <a:cs typeface="Amiri" pitchFamily="2" charset="-78"/>
+              </a:rPr>
               <a:t>TOPIC CONVERSATION — Stretch. Examiner asks the questions in order and may add “لِمَاذَا؟ / هَلْ يُمْكِنُ أَنْ تَشْرَحَ أَكْثَرَ؟” to push for more. Candidate aims for a developed answer: opinion, comparison, concession and a conditional.
 </a:t>
             </a:r>
@@ -1510,7 +1534,11 @@
           <a:lstStyle/>
           <a:p>
             <a:r>
-              <a:rPr lang="en-US" dirty="0"/>
+              <a:rPr lang="ar-SA" dirty="0">
+                <a:latin typeface="Amiri" pitchFamily="2" charset="-78"/>
+                <a:ea typeface="Amiri" pitchFamily="2" charset="-78"/>
+                <a:cs typeface="Amiri" pitchFamily="2" charset="-78"/>
+              </a:rPr>
               <a:t>WELCOME (1 min) — while students join.
 • Greet each student by name as they arrive: السَّلَامُ عَلَيْكُمْ. Take the register (Pastoral Tracker: attendance 0/1).
 • 2-MINUTE CHECK-IN (SEND training): a private chat to any student who seemed unsettled last lesson — “Are you okay today? 👍 / 👎”.
@@ -2224,7 +2252,11 @@
           <a:lstStyle/>
           <a:p>
             <a:r>
-              <a:rPr lang="en-US" dirty="0"/>
+              <a:rPr lang="ar-SA" dirty="0">
+                <a:latin typeface="Amiri" pitchFamily="2" charset="-78"/>
+                <a:ea typeface="Amiri" pitchFamily="2" charset="-78"/>
+                <a:cs typeface="Amiri" pitchFamily="2" charset="-78"/>
+              </a:rPr>
               <a:t>TEACH (3 min). Role play = precise and complete; conversation = develop. Choral repetition of the repair phrases. To a girl: تُعِيدِي.</a:t>
             </a:r>
             <a:endParaRPr lang="en-US" dirty="0"/>
@@ -2312,7 +2344,11 @@
           <a:lstStyle/>
           <a:p>
             <a:r>
-              <a:rPr lang="en-US" dirty="0"/>
+              <a:rPr lang="ar-SA" dirty="0">
+                <a:latin typeface="Amiri" pitchFamily="2" charset="-78"/>
+                <a:ea typeface="Amiri" pitchFamily="2" charset="-78"/>
+                <a:cs typeface="Amiri" pitchFamily="2" charset="-78"/>
+              </a:rPr>
               <a:t>LANGUAGE BANK (2 min) — possessive suffixes: -ī (my), -hu (his), -hā (her). The verb agrees with the body part: يُؤْلِمُنِي رَأْسِي (m.) · تُؤْلِمُنِي يَدِي (f. — hands, legs, eyes and ears are feminine).</a:t>
             </a:r>
             <a:endParaRPr lang="en-US" dirty="0"/>
@@ -2400,7 +2436,11 @@
           <a:lstStyle/>
           <a:p>
             <a:r>
-              <a:rPr lang="en-US" dirty="0"/>
+              <a:rPr lang="ar-SA" dirty="0">
+                <a:latin typeface="Amiri" pitchFamily="2" charset="-78"/>
+                <a:ea typeface="Amiri" pitchFamily="2" charset="-78"/>
+                <a:cs typeface="Amiri" pitchFamily="2" charset="-78"/>
+              </a:rPr>
               <a:t>LANGUAGE BANK (2 min) — عِنْدِي + symptom: عِنْدِي صُدَاعٌ وَحُمَّى. Duration: مُنْذُ يَوْمَيْنِ (for two days) · مُنْذُ ثَلَاثَةِ أَيَّامٍ · مُنْذُ أُسْبُوعٍ. Plural of مَرِيضٌ is مَرْضَى.</a:t>
             </a:r>
             <a:endParaRPr lang="en-US" dirty="0"/>
@@ -2576,7 +2616,11 @@
           <a:lstStyle/>
           <a:p>
             <a:r>
-              <a:rPr lang="en-US" dirty="0"/>
+              <a:rPr lang="ar-SA" dirty="0">
+                <a:latin typeface="Amiri" pitchFamily="2" charset="-78"/>
+                <a:ea typeface="Amiri" pitchFamily="2" charset="-78"/>
+                <a:cs typeface="Amiri" pitchFamily="2" charset="-78"/>
+              </a:rPr>
               <a:t>ROLE PLAY A (Core) — calling school.
 SET-UP IN THE BREAKOUT ROOM: A = examiner (reads the left column ONLY — the questions, in order), B = candidate (sees the task column; Core may use the help column), C = observer (ticks the feedback checklist). 1 minute preparation, about 3 minutes speaking, 1 minute feedback, then rotate.
 Task ! is the unexpected question: in the exam the candidate has not seen it — the examiner should read it without warning.
@@ -2668,7 +2712,11 @@
           <a:lstStyle/>
           <a:p>
             <a:r>
-              <a:rPr lang="en-US" dirty="0"/>
+              <a:rPr lang="ar-SA" dirty="0">
+                <a:latin typeface="Amiri" pitchFamily="2" charset="-78"/>
+                <a:ea typeface="Amiri" pitchFamily="2" charset="-78"/>
+                <a:cs typeface="Amiri" pitchFamily="2" charset="-78"/>
+              </a:rPr>
               <a:t>ROLE PLAY B (Core+) — at the school nurse.
 SET-UP IN THE BREAKOUT ROOM: A = examiner (reads the left column ONLY — the questions, in order), B = candidate (sees the task column; Core may use the help column), C = observer (ticks the feedback checklist). 1 minute preparation, about 3 minutes speaking, 1 minute feedback, then rotate.
 Task ! is the unexpected question: in the exam the candidate has not seen it — the examiner should read it without warning.
@@ -3156,6 +3204,7 @@
                   <a:srgbClr val="D4AF37"/>
                 </a:solidFill>
                 <a:latin typeface="Amiri" pitchFamily="2" charset="-78"/>
+                <a:ea typeface="Amiri" pitchFamily="2" charset="-78"/>
                 <a:cs typeface="Amiri" pitchFamily="2" charset="-78"/>
               </a:rPr>
               <a:t>م</a:t>
@@ -3362,6 +3411,7 @@
                   <a:srgbClr val="D4AF37"/>
                 </a:solidFill>
                 <a:latin typeface="Amiri" pitchFamily="2" charset="-78"/>
+                <a:ea typeface="Amiri" pitchFamily="2" charset="-78"/>
                 <a:cs typeface="Amiri" pitchFamily="2" charset="-78"/>
               </a:rPr>
               <a:t>وَرْشَةُ التَّحَدُّثِ — الجِسْمُ وَالمَشَاكِلُ الصِّحِّيَّةُ</a:t>
@@ -3819,6 +3869,7 @@
                   <a:srgbClr val="D4AF37"/>
                 </a:solidFill>
                 <a:latin typeface="Amiri" pitchFamily="2" charset="-78"/>
+                <a:ea typeface="Amiri" pitchFamily="2" charset="-78"/>
                 <a:cs typeface="Amiri" pitchFamily="2" charset="-78"/>
               </a:rPr>
               <a:t>م</a:t>
@@ -4139,6 +4190,7 @@
                   <a:srgbClr val="8A6D1E"/>
                 </a:solidFill>
                 <a:latin typeface="Amiri" pitchFamily="2" charset="-78"/>
+                <a:ea typeface="Amiri" pitchFamily="2" charset="-78"/>
                 <a:cs typeface="Amiri" pitchFamily="2" charset="-78"/>
               </a:rPr>
               <a:t>صَدِيقِي المَرِيضُ</a:t>
@@ -4419,6 +4471,7 @@
                   <a:srgbClr val="1B3B6F"/>
                 </a:solidFill>
                 <a:latin typeface="Amiri" pitchFamily="2" charset="-78"/>
+                <a:ea typeface="Amiri" pitchFamily="2" charset="-78"/>
                 <a:cs typeface="Amiri" pitchFamily="2" charset="-78"/>
               </a:rPr>
               <a:t>سَلَامَتُكَ! مَاذَا …؟</a:t>
@@ -4495,6 +4548,7 @@
                   <a:srgbClr val="1B3B6F"/>
                 </a:solidFill>
                 <a:latin typeface="Amiri" pitchFamily="2" charset="-78"/>
+                <a:ea typeface="Amiri" pitchFamily="2" charset="-78"/>
                 <a:cs typeface="Amiri" pitchFamily="2" charset="-78"/>
               </a:rPr>
               <a:t>أَهْلًا! أَنَا فِي السَّرِيرِ مُنْذُ يَوْمَيْنِ.</a:t>
@@ -4598,6 +4652,7 @@
                   <a:srgbClr val="1B3B6F"/>
                 </a:solidFill>
                 <a:latin typeface="Amiri" pitchFamily="2" charset="-78"/>
+                <a:ea typeface="Amiri" pitchFamily="2" charset="-78"/>
                 <a:cs typeface="Amiri" pitchFamily="2" charset="-78"/>
               </a:rPr>
               <a:t>ذَهَبْنَا إِلَى … وَكَانَتْ …</a:t>
@@ -4674,6 +4729,7 @@
                   <a:srgbClr val="1B3B6F"/>
                 </a:solidFill>
                 <a:latin typeface="Amiri" pitchFamily="2" charset="-78"/>
+                <a:ea typeface="Amiri" pitchFamily="2" charset="-78"/>
                 <a:cs typeface="Amiri" pitchFamily="2" charset="-78"/>
               </a:rPr>
               <a:t>عِنْدِي زُكَامٌ شَدِيدٌ. وَكَيْفَ كَانَتِ الرِّحْلَةُ؟</a:t>
@@ -4777,6 +4833,7 @@
                   <a:srgbClr val="1B3B6F"/>
                 </a:solidFill>
                 <a:latin typeface="Amiri" pitchFamily="2" charset="-78"/>
+                <a:ea typeface="Amiri" pitchFamily="2" charset="-78"/>
                 <a:cs typeface="Amiri" pitchFamily="2" charset="-78"/>
               </a:rPr>
               <a:t>يَجِبُ أَنْ … وَ…</a:t>
@@ -4853,6 +4910,7 @@
                   <a:srgbClr val="1B3B6F"/>
                 </a:solidFill>
                 <a:latin typeface="Amiri" pitchFamily="2" charset="-78"/>
+                <a:ea typeface="Amiri" pitchFamily="2" charset="-78"/>
                 <a:cs typeface="Amiri" pitchFamily="2" charset="-78"/>
               </a:rPr>
               <a:t>هَلْ عِنْدَكَ نَصِيحَةٌ لِي؟</a:t>
@@ -4956,6 +5014,7 @@
                   <a:srgbClr val="1B3B6F"/>
                 </a:solidFill>
                 <a:latin typeface="Amiri" pitchFamily="2" charset="-78"/>
+                <a:ea typeface="Amiri" pitchFamily="2" charset="-78"/>
                 <a:cs typeface="Amiri" pitchFamily="2" charset="-78"/>
               </a:rPr>
               <a:t>مَتَى …؟</a:t>
@@ -5032,6 +5091,7 @@
                   <a:srgbClr val="1B3B6F"/>
                 </a:solidFill>
                 <a:latin typeface="Amiri" pitchFamily="2" charset="-78"/>
+                <a:ea typeface="Amiri" pitchFamily="2" charset="-78"/>
                 <a:cs typeface="Amiri" pitchFamily="2" charset="-78"/>
               </a:rPr>
               <a:t>… الطَّبِيبُ قَالَ أُسْبُوعًا!</a:t>
@@ -5135,6 +5195,7 @@
                   <a:srgbClr val="1B3B6F"/>
                 </a:solidFill>
                 <a:latin typeface="Amiri" pitchFamily="2" charset="-78"/>
+                <a:ea typeface="Amiri" pitchFamily="2" charset="-78"/>
                 <a:cs typeface="Amiri" pitchFamily="2" charset="-78"/>
               </a:rPr>
               <a:t>طَبْعًا، سَأُرْسِلُ …</a:t>
@@ -5211,6 +5272,7 @@
                   <a:srgbClr val="1B3B6F"/>
                 </a:solidFill>
                 <a:latin typeface="Amiri" pitchFamily="2" charset="-78"/>
+                <a:ea typeface="Amiri" pitchFamily="2" charset="-78"/>
                 <a:cs typeface="Amiri" pitchFamily="2" charset="-78"/>
               </a:rPr>
               <a:t>هَلْ تُرْسِلُ لِي الوَاجِبَ؟</a:t>
@@ -5420,6 +5482,7 @@
                   <a:srgbClr val="D4AF37"/>
                 </a:solidFill>
                 <a:latin typeface="Amiri" pitchFamily="2" charset="-78"/>
+                <a:ea typeface="Amiri" pitchFamily="2" charset="-78"/>
                 <a:cs typeface="Amiri" pitchFamily="2" charset="-78"/>
               </a:rPr>
               <a:t>م</a:t>
@@ -5740,6 +5803,7 @@
                   <a:srgbClr val="8A6D1E"/>
                 </a:solidFill>
                 <a:latin typeface="Amiri" pitchFamily="2" charset="-78"/>
+                <a:ea typeface="Amiri" pitchFamily="2" charset="-78"/>
                 <a:cs typeface="Amiri" pitchFamily="2" charset="-78"/>
               </a:rPr>
               <a:t>فِي العِيَادَةِ</a:t>
@@ -6020,6 +6084,7 @@
                   <a:srgbClr val="1B3B6F"/>
                 </a:solidFill>
                 <a:latin typeface="Amiri" pitchFamily="2" charset="-78"/>
+                <a:ea typeface="Amiri" pitchFamily="2" charset="-78"/>
                 <a:cs typeface="Amiri" pitchFamily="2" charset="-78"/>
               </a:rPr>
               <a:t>بَدَأَتْ قَبْلَ … عِنْدَمَا …</a:t>
@@ -6096,6 +6161,7 @@
                   <a:srgbClr val="1B3B6F"/>
                 </a:solidFill>
                 <a:latin typeface="Amiri" pitchFamily="2" charset="-78"/>
+                <a:ea typeface="Amiri" pitchFamily="2" charset="-78"/>
                 <a:cs typeface="Amiri" pitchFamily="2" charset="-78"/>
               </a:rPr>
               <a:t>مَتَى بَدَأَتِ الأَعْرَاضُ؟ وَكَيْفَ؟</a:t>
@@ -6199,6 +6265,7 @@
                   <a:srgbClr val="1B3B6F"/>
                 </a:solidFill>
                 <a:latin typeface="Amiri" pitchFamily="2" charset="-78"/>
+                <a:ea typeface="Amiri" pitchFamily="2" charset="-78"/>
                 <a:cs typeface="Amiri" pitchFamily="2" charset="-78"/>
               </a:rPr>
               <a:t>عِنْدِي … وَيَزْدَادُ … عِنْدَمَا …</a:t>
@@ -6275,6 +6342,7 @@
                   <a:srgbClr val="1B3B6F"/>
                 </a:solidFill>
                 <a:latin typeface="Amiri" pitchFamily="2" charset="-78"/>
+                <a:ea typeface="Amiri" pitchFamily="2" charset="-78"/>
                 <a:cs typeface="Amiri" pitchFamily="2" charset="-78"/>
               </a:rPr>
               <a:t>صِفْ لِي الأَلَمَ.</a:t>
@@ -6378,6 +6446,7 @@
                   <a:srgbClr val="1B3B6F"/>
                 </a:solidFill>
                 <a:latin typeface="Amiri" pitchFamily="2" charset="-78"/>
+                <a:ea typeface="Amiri" pitchFamily="2" charset="-78"/>
                 <a:cs typeface="Amiri" pitchFamily="2" charset="-78"/>
               </a:rPr>
               <a:t>أَخَذْتُ … لٰكِنَّهُ لَمْ …</a:t>
@@ -6454,6 +6523,7 @@
                   <a:srgbClr val="1B3B6F"/>
                 </a:solidFill>
                 <a:latin typeface="Amiri" pitchFamily="2" charset="-78"/>
+                <a:ea typeface="Amiri" pitchFamily="2" charset="-78"/>
                 <a:cs typeface="Amiri" pitchFamily="2" charset="-78"/>
               </a:rPr>
               <a:t>هَلْ أَخَذْتَ أَيَّ دَوَاءٍ؟</a:t>
@@ -6557,6 +6627,7 @@
                   <a:srgbClr val="1B3B6F"/>
                 </a:solidFill>
                 <a:latin typeface="Amiri" pitchFamily="2" charset="-78"/>
+                <a:ea typeface="Amiri" pitchFamily="2" charset="-78"/>
                 <a:cs typeface="Amiri" pitchFamily="2" charset="-78"/>
               </a:rPr>
               <a:t>نَعَمْ، فِي … لٰكِنْ هٰذِهِ المَرَّةَ …</a:t>
@@ -6633,6 +6704,7 @@
                   <a:srgbClr val="1B3B6F"/>
                 </a:solidFill>
                 <a:latin typeface="Amiri" pitchFamily="2" charset="-78"/>
+                <a:ea typeface="Amiri" pitchFamily="2" charset="-78"/>
                 <a:cs typeface="Amiri" pitchFamily="2" charset="-78"/>
               </a:rPr>
               <a:t>هَلْ حَدَثَ هٰذَا مِنْ قَبْلُ؟</a:t>
@@ -6736,6 +6808,7 @@
                   <a:srgbClr val="1B3B6F"/>
                 </a:solidFill>
                 <a:latin typeface="Amiri" pitchFamily="2" charset="-78"/>
+                <a:ea typeface="Amiri" pitchFamily="2" charset="-78"/>
                 <a:cs typeface="Amiri" pitchFamily="2" charset="-78"/>
               </a:rPr>
               <a:t>سَأَرْتَاحُ … لٰكِنْ يَجِبُ أَنْ …</a:t>
@@ -6812,6 +6885,7 @@
                   <a:srgbClr val="1B3B6F"/>
                 </a:solidFill>
                 <a:latin typeface="Amiri" pitchFamily="2" charset="-78"/>
+                <a:ea typeface="Amiri" pitchFamily="2" charset="-78"/>
                 <a:cs typeface="Amiri" pitchFamily="2" charset="-78"/>
               </a:rPr>
               <a:t>لَوْ أَعْطَيْتُكَ إِجَازَةً أُسْبُوعًا، مَاذَا سَتَفْعَلُ؟</a:t>
@@ -7021,6 +7095,7 @@
                   <a:srgbClr val="D4AF37"/>
                 </a:solidFill>
                 <a:latin typeface="Amiri" pitchFamily="2" charset="-78"/>
+                <a:ea typeface="Amiri" pitchFamily="2" charset="-78"/>
                 <a:cs typeface="Amiri" pitchFamily="2" charset="-78"/>
               </a:rPr>
               <a:t>م</a:t>
@@ -7341,6 +7416,7 @@
                   <a:srgbClr val="8A6D1E"/>
                 </a:solidFill>
                 <a:latin typeface="Amiri" pitchFamily="2" charset="-78"/>
+                <a:ea typeface="Amiri" pitchFamily="2" charset="-78"/>
                 <a:cs typeface="Amiri" pitchFamily="2" charset="-78"/>
               </a:rPr>
               <a:t>وَرَقَةُ المُلَاحِظِ</a:t>
@@ -8811,6 +8887,7 @@
                   <a:srgbClr val="D4AF37"/>
                 </a:solidFill>
                 <a:latin typeface="Amiri" pitchFamily="2" charset="-78"/>
+                <a:ea typeface="Amiri" pitchFamily="2" charset="-78"/>
                 <a:cs typeface="Amiri" pitchFamily="2" charset="-78"/>
               </a:rPr>
               <a:t>م</a:t>
@@ -9131,6 +9208,7 @@
                   <a:srgbClr val="8A6D1E"/>
                 </a:solidFill>
                 <a:latin typeface="Amiri" pitchFamily="2" charset="-78"/>
+                <a:ea typeface="Amiri" pitchFamily="2" charset="-78"/>
                 <a:cs typeface="Amiri" pitchFamily="2" charset="-78"/>
               </a:rPr>
               <a:t>نَمُوذَجُ الإِجَابَةِ</a:t>
@@ -9373,6 +9451,7 @@
                   <a:srgbClr val="1B3B6F"/>
                 </a:solidFill>
                 <a:latin typeface="Amiri" pitchFamily="2" charset="-78"/>
+                <a:ea typeface="Amiri" pitchFamily="2" charset="-78"/>
                 <a:cs typeface="Amiri" pitchFamily="2" charset="-78"/>
               </a:rPr>
               <a:t>صَبَاحُ النُّورِ، أَنَا سَامِي فِي الصَّفِّ العَاشِرِ.</a:t>
@@ -9449,6 +9528,7 @@
                   <a:srgbClr val="1B3B6F"/>
                 </a:solidFill>
                 <a:latin typeface="Amiri" pitchFamily="2" charset="-78"/>
+                <a:ea typeface="Amiri" pitchFamily="2" charset="-78"/>
                 <a:cs typeface="Amiri" pitchFamily="2" charset="-78"/>
               </a:rPr>
               <a:t>مَدْرَسَةُ النُّورِ، صَبَاحُ الخَيْرِ. مَنْ مَعِي؟</a:t>
@@ -9552,6 +9632,7 @@
                   <a:srgbClr val="1B3B6F"/>
                 </a:solidFill>
                 <a:latin typeface="Amiri" pitchFamily="2" charset="-78"/>
+                <a:ea typeface="Amiri" pitchFamily="2" charset="-78"/>
                 <a:cs typeface="Amiri" pitchFamily="2" charset="-78"/>
               </a:rPr>
               <a:t>أَنَا مَرِيضٌ اليَوْمَ، وَلَا أَسْتَطِيعُ أَنْ آتِيَ إِلَى المَدْرَسَةِ.</a:t>
@@ -9628,6 +9709,7 @@
                   <a:srgbClr val="1B3B6F"/>
                 </a:solidFill>
                 <a:latin typeface="Amiri" pitchFamily="2" charset="-78"/>
+                <a:ea typeface="Amiri" pitchFamily="2" charset="-78"/>
                 <a:cs typeface="Amiri" pitchFamily="2" charset="-78"/>
               </a:rPr>
               <a:t>مَا المُشْكِلَةُ؟</a:t>
@@ -9731,6 +9813,7 @@
                   <a:srgbClr val="1B3B6F"/>
                 </a:solidFill>
                 <a:latin typeface="Amiri" pitchFamily="2" charset="-78"/>
+                <a:ea typeface="Amiri" pitchFamily="2" charset="-78"/>
                 <a:cs typeface="Amiri" pitchFamily="2" charset="-78"/>
               </a:rPr>
               <a:t>يُؤْلِمُنِي رَأْسِي وَبَطْنِي كَثِيرًا.</a:t>
@@ -9807,6 +9890,7 @@
                   <a:srgbClr val="1B3B6F"/>
                 </a:solidFill>
                 <a:latin typeface="Amiri" pitchFamily="2" charset="-78"/>
+                <a:ea typeface="Amiri" pitchFamily="2" charset="-78"/>
                 <a:cs typeface="Amiri" pitchFamily="2" charset="-78"/>
               </a:rPr>
               <a:t>مَاذَا يُؤْلِمُكَ؟</a:t>
@@ -9910,6 +9994,7 @@
                   <a:srgbClr val="1B3B6F"/>
                 </a:solidFill>
                 <a:latin typeface="Amiri" pitchFamily="2" charset="-78"/>
+                <a:ea typeface="Amiri" pitchFamily="2" charset="-78"/>
                 <a:cs typeface="Amiri" pitchFamily="2" charset="-78"/>
               </a:rPr>
               <a:t>نَعَمْ، عِنْدِي حُمَّى وَسُعَالٌ أَيْضًا.</a:t>
@@ -9986,6 +10071,7 @@
                   <a:srgbClr val="1B3B6F"/>
                 </a:solidFill>
                 <a:latin typeface="Amiri" pitchFamily="2" charset="-78"/>
+                <a:ea typeface="Amiri" pitchFamily="2" charset="-78"/>
                 <a:cs typeface="Amiri" pitchFamily="2" charset="-78"/>
               </a:rPr>
               <a:t>هَلْ عِنْدَكَ حُمَّى؟</a:t>
@@ -10089,6 +10175,7 @@
                   <a:srgbClr val="1B3B6F"/>
                 </a:solidFill>
                 <a:latin typeface="Amiri" pitchFamily="2" charset="-78"/>
+                <a:ea typeface="Amiri" pitchFamily="2" charset="-78"/>
                 <a:cs typeface="Amiri" pitchFamily="2" charset="-78"/>
               </a:rPr>
               <a:t>مُنْذُ أَمْسِ فِي المَسَاءِ.</a:t>
@@ -10165,6 +10252,7 @@
                   <a:srgbClr val="1B3B6F"/>
                 </a:solidFill>
                 <a:latin typeface="Amiri" pitchFamily="2" charset="-78"/>
+                <a:ea typeface="Amiri" pitchFamily="2" charset="-78"/>
                 <a:cs typeface="Amiri" pitchFamily="2" charset="-78"/>
               </a:rPr>
               <a:t>مُنْذُ مَتَى أَنْتَ مَرِيضٌ؟</a:t>
@@ -10374,6 +10462,7 @@
                   <a:srgbClr val="D4AF37"/>
                 </a:solidFill>
                 <a:latin typeface="Amiri" pitchFamily="2" charset="-78"/>
+                <a:ea typeface="Amiri" pitchFamily="2" charset="-78"/>
                 <a:cs typeface="Amiri" pitchFamily="2" charset="-78"/>
               </a:rPr>
               <a:t>م</a:t>
@@ -10694,6 +10783,7 @@
                   <a:srgbClr val="8A6D1E"/>
                 </a:solidFill>
                 <a:latin typeface="Amiri" pitchFamily="2" charset="-78"/>
+                <a:ea typeface="Amiri" pitchFamily="2" charset="-78"/>
                 <a:cs typeface="Amiri" pitchFamily="2" charset="-78"/>
               </a:rPr>
               <a:t>نَمُوذَجُ الإِجَابَةِ</a:t>
@@ -10936,6 +11026,7 @@
                   <a:srgbClr val="1B3B6F"/>
                 </a:solidFill>
                 <a:latin typeface="Amiri" pitchFamily="2" charset="-78"/>
+                <a:ea typeface="Amiri" pitchFamily="2" charset="-78"/>
                 <a:cs typeface="Amiri" pitchFamily="2" charset="-78"/>
               </a:rPr>
               <a:t>وَقَعْتُ فِي المَلْعَبِ أَثْنَاءَ المُبَارَاةِ.</a:t>
@@ -11012,6 +11103,7 @@
                   <a:srgbClr val="1B3B6F"/>
                 </a:solidFill>
                 <a:latin typeface="Amiri" pitchFamily="2" charset="-78"/>
+                <a:ea typeface="Amiri" pitchFamily="2" charset="-78"/>
                 <a:cs typeface="Amiri" pitchFamily="2" charset="-78"/>
               </a:rPr>
               <a:t>مَاذَا حَدَثَ لَكَ؟</a:t>
@@ -11115,6 +11207,7 @@
                   <a:srgbClr val="1B3B6F"/>
                 </a:solidFill>
                 <a:latin typeface="Amiri" pitchFamily="2" charset="-78"/>
+                <a:ea typeface="Amiri" pitchFamily="2" charset="-78"/>
                 <a:cs typeface="Amiri" pitchFamily="2" charset="-78"/>
               </a:rPr>
               <a:t>تُؤْلِمُنِي رِجْلِي اليُسْرَى، وَيَدِي أَيْضًا.</a:t>
@@ -11191,6 +11284,7 @@
                   <a:srgbClr val="1B3B6F"/>
                 </a:solidFill>
                 <a:latin typeface="Amiri" pitchFamily="2" charset="-78"/>
+                <a:ea typeface="Amiri" pitchFamily="2" charset="-78"/>
                 <a:cs typeface="Amiri" pitchFamily="2" charset="-78"/>
               </a:rPr>
               <a:t>أَيْنَ الأَلَمُ؟</a:t>
@@ -11294,6 +11388,7 @@
                   <a:srgbClr val="1B3B6F"/>
                 </a:solidFill>
                 <a:latin typeface="Amiri" pitchFamily="2" charset="-78"/>
+                <a:ea typeface="Amiri" pitchFamily="2" charset="-78"/>
                 <a:cs typeface="Amiri" pitchFamily="2" charset="-78"/>
               </a:rPr>
               <a:t>أَسْتَطِيعُ أَنْ أَمْشِيَ، لٰكِنْ بِبُطْءٍ، لِأَنَّ الأَلَمَ شَدِيدٌ.</a:t>
@@ -11370,6 +11465,7 @@
                   <a:srgbClr val="1B3B6F"/>
                 </a:solidFill>
                 <a:latin typeface="Amiri" pitchFamily="2" charset="-78"/>
+                <a:ea typeface="Amiri" pitchFamily="2" charset="-78"/>
                 <a:cs typeface="Amiri" pitchFamily="2" charset="-78"/>
               </a:rPr>
               <a:t>هَلْ تَسْتَطِيعُ أَنْ تَمْشِيَ؟</a:t>
@@ -11473,6 +11569,7 @@
                   <a:srgbClr val="1B3B6F"/>
                 </a:solidFill>
                 <a:latin typeface="Amiri" pitchFamily="2" charset="-78"/>
+                <a:ea typeface="Amiri" pitchFamily="2" charset="-78"/>
                 <a:cs typeface="Amiri" pitchFamily="2" charset="-78"/>
               </a:rPr>
               <a:t>هَلْ يَجِبُ أَنْ أَرْجِعَ إِلَى البَيْتِ؟</a:t>
@@ -11549,6 +11646,7 @@
                   <a:srgbClr val="1B3B6F"/>
                 </a:solidFill>
                 <a:latin typeface="Amiri" pitchFamily="2" charset="-78"/>
+                <a:ea typeface="Amiri" pitchFamily="2" charset="-78"/>
                 <a:cs typeface="Amiri" pitchFamily="2" charset="-78"/>
               </a:rPr>
               <a:t>… سَأَضَعُ الثَّلْجَ عَلَى رِجْلِكَ.</a:t>
@@ -11652,6 +11750,7 @@
                   <a:srgbClr val="1B3B6F"/>
                 </a:solidFill>
                 <a:latin typeface="Amiri" pitchFamily="2" charset="-78"/>
+                <a:ea typeface="Amiri" pitchFamily="2" charset="-78"/>
                 <a:cs typeface="Amiri" pitchFamily="2" charset="-78"/>
               </a:rPr>
               <a:t>نَعَمْ، مِنْ فَضْلِكِ، اتَّصِلِي بِأُمِّي، رَقْمُهَا فِي دَفْتَرِي.</a:t>
@@ -11728,6 +11827,7 @@
                   <a:srgbClr val="1B3B6F"/>
                 </a:solidFill>
                 <a:latin typeface="Amiri" pitchFamily="2" charset="-78"/>
+                <a:ea typeface="Amiri" pitchFamily="2" charset="-78"/>
                 <a:cs typeface="Amiri" pitchFamily="2" charset="-78"/>
               </a:rPr>
               <a:t>هَلْ تُرِيدُ أَنْ أَتَّصِلَ بِأُسْرَتِكَ؟</a:t>
@@ -11937,6 +12037,7 @@
                   <a:srgbClr val="D4AF37"/>
                 </a:solidFill>
                 <a:latin typeface="Amiri" pitchFamily="2" charset="-78"/>
+                <a:ea typeface="Amiri" pitchFamily="2" charset="-78"/>
                 <a:cs typeface="Amiri" pitchFamily="2" charset="-78"/>
               </a:rPr>
               <a:t>م</a:t>
@@ -12257,6 +12358,7 @@
                   <a:srgbClr val="8A6D1E"/>
                 </a:solidFill>
                 <a:latin typeface="Amiri" pitchFamily="2" charset="-78"/>
+                <a:ea typeface="Amiri" pitchFamily="2" charset="-78"/>
                 <a:cs typeface="Amiri" pitchFamily="2" charset="-78"/>
               </a:rPr>
               <a:t>نَمُوذَجُ الإِجَابَةِ</a:t>
@@ -12499,6 +12601,7 @@
                   <a:srgbClr val="1B3B6F"/>
                 </a:solidFill>
                 <a:latin typeface="Amiri" pitchFamily="2" charset="-78"/>
+                <a:ea typeface="Amiri" pitchFamily="2" charset="-78"/>
                 <a:cs typeface="Amiri" pitchFamily="2" charset="-78"/>
               </a:rPr>
               <a:t>سَلَامَتُكَ يَا صَدِيقِي! مَاذَا عِنْدَكَ بِالضَّبْطِ؟</a:t>
@@ -12575,6 +12678,7 @@
                   <a:srgbClr val="1B3B6F"/>
                 </a:solidFill>
                 <a:latin typeface="Amiri" pitchFamily="2" charset="-78"/>
+                <a:ea typeface="Amiri" pitchFamily="2" charset="-78"/>
                 <a:cs typeface="Amiri" pitchFamily="2" charset="-78"/>
               </a:rPr>
               <a:t>أَهْلًا! أَنَا فِي السَّرِيرِ مُنْذُ يَوْمَيْنِ.</a:t>
@@ -12678,6 +12782,7 @@
                   <a:srgbClr val="1B3B6F"/>
                 </a:solidFill>
                 <a:latin typeface="Amiri" pitchFamily="2" charset="-78"/>
+                <a:ea typeface="Amiri" pitchFamily="2" charset="-78"/>
                 <a:cs typeface="Amiri" pitchFamily="2" charset="-78"/>
               </a:rPr>
               <a:t>ذَهَبْنَا إِلَى المُتْحَفِ، وَكَانَتِ الرِّحْلَةُ رَائِعَةً، لٰكِنَّنَا افْتَقَدْنَاكَ كَثِيرًا.</a:t>
@@ -12754,6 +12859,7 @@
                   <a:srgbClr val="1B3B6F"/>
                 </a:solidFill>
                 <a:latin typeface="Amiri" pitchFamily="2" charset="-78"/>
+                <a:ea typeface="Amiri" pitchFamily="2" charset="-78"/>
                 <a:cs typeface="Amiri" pitchFamily="2" charset="-78"/>
               </a:rPr>
               <a:t>عِنْدِي زُكَامٌ شَدِيدٌ. وَكَيْفَ كَانَتِ الرِّحْلَةُ؟</a:t>
@@ -12857,6 +12963,7 @@
                   <a:srgbClr val="1B3B6F"/>
                 </a:solidFill>
                 <a:latin typeface="Amiri" pitchFamily="2" charset="-78"/>
+                <a:ea typeface="Amiri" pitchFamily="2" charset="-78"/>
                 <a:cs typeface="Amiri" pitchFamily="2" charset="-78"/>
               </a:rPr>
               <a:t>يَجِبُ أَنْ تَشْرَبَ سَوَائِلَ دَافِئَةً، وَأَنْ تَرْتَاحَ كَثِيرًا.</a:t>
@@ -12933,6 +13040,7 @@
                   <a:srgbClr val="1B3B6F"/>
                 </a:solidFill>
                 <a:latin typeface="Amiri" pitchFamily="2" charset="-78"/>
+                <a:ea typeface="Amiri" pitchFamily="2" charset="-78"/>
                 <a:cs typeface="Amiri" pitchFamily="2" charset="-78"/>
               </a:rPr>
               <a:t>هَلْ عِنْدَكَ نَصِيحَةٌ لِي؟</a:t>
@@ -13036,6 +13144,7 @@
                   <a:srgbClr val="1B3B6F"/>
                 </a:solidFill>
                 <a:latin typeface="Amiri" pitchFamily="2" charset="-78"/>
+                <a:ea typeface="Amiri" pitchFamily="2" charset="-78"/>
                 <a:cs typeface="Amiri" pitchFamily="2" charset="-78"/>
               </a:rPr>
               <a:t>إِذَنْ، مَتَى سَتَرْجِعُ إِلَى المَدْرَسَةِ؟</a:t>
@@ -13112,6 +13221,7 @@
                   <a:srgbClr val="1B3B6F"/>
                 </a:solidFill>
                 <a:latin typeface="Amiri" pitchFamily="2" charset="-78"/>
+                <a:ea typeface="Amiri" pitchFamily="2" charset="-78"/>
                 <a:cs typeface="Amiri" pitchFamily="2" charset="-78"/>
               </a:rPr>
               <a:t>… الطَّبِيبُ قَالَ أُسْبُوعًا!</a:t>
@@ -13215,6 +13325,7 @@
                   <a:srgbClr val="1B3B6F"/>
                 </a:solidFill>
                 <a:latin typeface="Amiri" pitchFamily="2" charset="-78"/>
+                <a:ea typeface="Amiri" pitchFamily="2" charset="-78"/>
                 <a:cs typeface="Amiri" pitchFamily="2" charset="-78"/>
               </a:rPr>
               <a:t>طَبْعًا، سَأُرْسِلُ لَكَ الوَاجِبَ وَصُوَرَ الرِّحْلَةِ اللَّيْلَةَ.</a:t>
@@ -13291,6 +13402,7 @@
                   <a:srgbClr val="1B3B6F"/>
                 </a:solidFill>
                 <a:latin typeface="Amiri" pitchFamily="2" charset="-78"/>
+                <a:ea typeface="Amiri" pitchFamily="2" charset="-78"/>
                 <a:cs typeface="Amiri" pitchFamily="2" charset="-78"/>
               </a:rPr>
               <a:t>هَلْ تُرْسِلُ لِي الوَاجِبَ؟</a:t>
@@ -13500,6 +13612,7 @@
                   <a:srgbClr val="D4AF37"/>
                 </a:solidFill>
                 <a:latin typeface="Amiri" pitchFamily="2" charset="-78"/>
+                <a:ea typeface="Amiri" pitchFamily="2" charset="-78"/>
                 <a:cs typeface="Amiri" pitchFamily="2" charset="-78"/>
               </a:rPr>
               <a:t>م</a:t>
@@ -13820,6 +13933,7 @@
                   <a:srgbClr val="8A6D1E"/>
                 </a:solidFill>
                 <a:latin typeface="Amiri" pitchFamily="2" charset="-78"/>
+                <a:ea typeface="Amiri" pitchFamily="2" charset="-78"/>
                 <a:cs typeface="Amiri" pitchFamily="2" charset="-78"/>
               </a:rPr>
               <a:t>نَمُوذَجُ الإِجَابَةِ</a:t>
@@ -14062,6 +14176,7 @@
                   <a:srgbClr val="1B3B6F"/>
                 </a:solidFill>
                 <a:latin typeface="Amiri" pitchFamily="2" charset="-78"/>
+                <a:ea typeface="Amiri" pitchFamily="2" charset="-78"/>
                 <a:cs typeface="Amiri" pitchFamily="2" charset="-78"/>
               </a:rPr>
               <a:t>بَدَأَتْ قَبْلَ ثَلَاثَةِ أَيَّامٍ، عِنْدَمَا رَجَعْتُ مِنَ المُبَارَاةِ مُبْتَلًّا بِالمَطَرِ.</a:t>
@@ -14138,6 +14253,7 @@
                   <a:srgbClr val="1B3B6F"/>
                 </a:solidFill>
                 <a:latin typeface="Amiri" pitchFamily="2" charset="-78"/>
+                <a:ea typeface="Amiri" pitchFamily="2" charset="-78"/>
                 <a:cs typeface="Amiri" pitchFamily="2" charset="-78"/>
               </a:rPr>
               <a:t>مَتَى بَدَأَتِ الأَعْرَاضُ؟ وَكَيْفَ؟</a:t>
@@ -14241,6 +14357,7 @@
                   <a:srgbClr val="1B3B6F"/>
                 </a:solidFill>
                 <a:latin typeface="Amiri" pitchFamily="2" charset="-78"/>
+                <a:ea typeface="Amiri" pitchFamily="2" charset="-78"/>
                 <a:cs typeface="Amiri" pitchFamily="2" charset="-78"/>
               </a:rPr>
               <a:t>عِنْدِي صُدَاعٌ وَسُعَالٌ، وَيَزْدَادُ السُّعَالُ فِي اللَّيْلِ، فَلَا أَسْتَطِيعُ أَنْ أَنَامَ.</a:t>
@@ -14317,6 +14434,7 @@
                   <a:srgbClr val="1B3B6F"/>
                 </a:solidFill>
                 <a:latin typeface="Amiri" pitchFamily="2" charset="-78"/>
+                <a:ea typeface="Amiri" pitchFamily="2" charset="-78"/>
                 <a:cs typeface="Amiri" pitchFamily="2" charset="-78"/>
               </a:rPr>
               <a:t>صِفْ لِي الأَلَمَ.</a:t>
@@ -14420,6 +14538,7 @@
                   <a:srgbClr val="1B3B6F"/>
                 </a:solidFill>
                 <a:latin typeface="Amiri" pitchFamily="2" charset="-78"/>
+                <a:ea typeface="Amiri" pitchFamily="2" charset="-78"/>
                 <a:cs typeface="Amiri" pitchFamily="2" charset="-78"/>
               </a:rPr>
               <a:t>أَخَذْتُ دَوَاءً لِلصُّدَاعِ، لٰكِنَّهُ لَمْ يُسَاعِدْنِي كَثِيرًا.</a:t>
@@ -14496,6 +14615,7 @@
                   <a:srgbClr val="1B3B6F"/>
                 </a:solidFill>
                 <a:latin typeface="Amiri" pitchFamily="2" charset="-78"/>
+                <a:ea typeface="Amiri" pitchFamily="2" charset="-78"/>
                 <a:cs typeface="Amiri" pitchFamily="2" charset="-78"/>
               </a:rPr>
               <a:t>هَلْ أَخَذْتَ أَيَّ دَوَاءٍ؟</a:t>
@@ -14599,6 +14719,7 @@
                   <a:srgbClr val="1B3B6F"/>
                 </a:solidFill>
                 <a:latin typeface="Amiri" pitchFamily="2" charset="-78"/>
+                <a:ea typeface="Amiri" pitchFamily="2" charset="-78"/>
                 <a:cs typeface="Amiri" pitchFamily="2" charset="-78"/>
               </a:rPr>
               <a:t>نَعَمْ، فِي الشِّتَاءِ المَاضِي، لٰكِنَّ الأَعْرَاضَ هٰذِهِ المَرَّةَ أَشَدُّ وَأَطْوَلُ.</a:t>
@@ -14675,6 +14796,7 @@
                   <a:srgbClr val="1B3B6F"/>
                 </a:solidFill>
                 <a:latin typeface="Amiri" pitchFamily="2" charset="-78"/>
+                <a:ea typeface="Amiri" pitchFamily="2" charset="-78"/>
                 <a:cs typeface="Amiri" pitchFamily="2" charset="-78"/>
               </a:rPr>
               <a:t>هَلْ حَدَثَ هٰذَا مِنْ قَبْلُ؟</a:t>
@@ -14778,6 +14900,7 @@
                   <a:srgbClr val="1B3B6F"/>
                 </a:solidFill>
                 <a:latin typeface="Amiri" pitchFamily="2" charset="-78"/>
+                <a:ea typeface="Amiri" pitchFamily="2" charset="-78"/>
                 <a:cs typeface="Amiri" pitchFamily="2" charset="-78"/>
               </a:rPr>
               <a:t>سَأَرْتَاحُ فِي البَيْتِ، لٰكِنْ يَجِبُ أَنْ أُرَاجِعَ دُرُوسِي، لِأَنَّ الامْتِحَانَاتِ قَرِيبَةٌ.</a:t>
@@ -14854,6 +14977,7 @@
                   <a:srgbClr val="1B3B6F"/>
                 </a:solidFill>
                 <a:latin typeface="Amiri" pitchFamily="2" charset="-78"/>
+                <a:ea typeface="Amiri" pitchFamily="2" charset="-78"/>
                 <a:cs typeface="Amiri" pitchFamily="2" charset="-78"/>
               </a:rPr>
               <a:t>لَوْ أَعْطَيْتُكَ إِجَازَةً أُسْبُوعًا، مَاذَا سَتَفْعَلُ؟</a:t>
@@ -15063,6 +15187,7 @@
                   <a:srgbClr val="D4AF37"/>
                 </a:solidFill>
                 <a:latin typeface="Amiri" pitchFamily="2" charset="-78"/>
+                <a:ea typeface="Amiri" pitchFamily="2" charset="-78"/>
                 <a:cs typeface="Amiri" pitchFamily="2" charset="-78"/>
               </a:rPr>
               <a:t>م</a:t>
@@ -15383,6 +15508,7 @@
                   <a:srgbClr val="8A6D1E"/>
                 </a:solidFill>
                 <a:latin typeface="Amiri" pitchFamily="2" charset="-78"/>
+                <a:ea typeface="Amiri" pitchFamily="2" charset="-78"/>
                 <a:cs typeface="Amiri" pitchFamily="2" charset="-78"/>
               </a:rPr>
               <a:t>صِحَّتِي</a:t>
@@ -15663,6 +15789,7 @@
                   <a:srgbClr val="1B3B6F"/>
                 </a:solidFill>
                 <a:latin typeface="Amiri" pitchFamily="2" charset="-78"/>
+                <a:ea typeface="Amiri" pitchFamily="2" charset="-78"/>
                 <a:cs typeface="Amiri" pitchFamily="2" charset="-78"/>
               </a:rPr>
               <a:t>صِحَّتِي … الحَمْدُ لِلّٰهِ</a:t>
@@ -15739,6 +15866,7 @@
                   <a:srgbClr val="1B3B6F"/>
                 </a:solidFill>
                 <a:latin typeface="Amiri" pitchFamily="2" charset="-78"/>
+                <a:ea typeface="Amiri" pitchFamily="2" charset="-78"/>
                 <a:cs typeface="Amiri" pitchFamily="2" charset="-78"/>
               </a:rPr>
               <a:t>كَيْفَ صِحَّتُكَ اليَوْمَ؟</a:t>
@@ -15907,6 +16035,7 @@
                   <a:srgbClr val="1B3B6F"/>
                 </a:solidFill>
                 <a:latin typeface="Amiri" pitchFamily="2" charset="-78"/>
+                <a:ea typeface="Amiri" pitchFamily="2" charset="-78"/>
                 <a:cs typeface="Amiri" pitchFamily="2" charset="-78"/>
               </a:rPr>
               <a:t>كُنْتُ مَرِيضًا فِي …</a:t>
@@ -15983,6 +16112,7 @@
                   <a:srgbClr val="1B3B6F"/>
                 </a:solidFill>
                 <a:latin typeface="Amiri" pitchFamily="2" charset="-78"/>
+                <a:ea typeface="Amiri" pitchFamily="2" charset="-78"/>
                 <a:cs typeface="Amiri" pitchFamily="2" charset="-78"/>
               </a:rPr>
               <a:t>مَتَى كُنْتَ مَرِيضًا آخِرَ مَرَّةٍ؟</a:t>
@@ -16151,6 +16281,7 @@
                   <a:srgbClr val="1B3B6F"/>
                 </a:solidFill>
                 <a:latin typeface="Amiri" pitchFamily="2" charset="-78"/>
+                <a:ea typeface="Amiri" pitchFamily="2" charset="-78"/>
                 <a:cs typeface="Amiri" pitchFamily="2" charset="-78"/>
               </a:rPr>
               <a:t>عِنْدَمَا يُؤْلِمُنِي رَأْسِي، …</a:t>
@@ -16227,6 +16358,7 @@
                   <a:srgbClr val="1B3B6F"/>
                 </a:solidFill>
                 <a:latin typeface="Amiri" pitchFamily="2" charset="-78"/>
+                <a:ea typeface="Amiri" pitchFamily="2" charset="-78"/>
                 <a:cs typeface="Amiri" pitchFamily="2" charset="-78"/>
               </a:rPr>
               <a:t>مَاذَا تَفْعَلُ عِنْدَمَا يُؤْلِمُكَ رَأْسُكَ؟</a:t>
@@ -16395,6 +16527,7 @@
                   <a:srgbClr val="1B3B6F"/>
                 </a:solidFill>
                 <a:latin typeface="Amiri" pitchFamily="2" charset="-78"/>
+                <a:ea typeface="Amiri" pitchFamily="2" charset="-78"/>
                 <a:cs typeface="Amiri" pitchFamily="2" charset="-78"/>
               </a:rPr>
               <a:t>لَا، أَذْهَبُ … فَقَطْ</a:t>
@@ -16471,6 +16604,7 @@
                   <a:srgbClr val="1B3B6F"/>
                 </a:solidFill>
                 <a:latin typeface="Amiri" pitchFamily="2" charset="-78"/>
+                <a:ea typeface="Amiri" pitchFamily="2" charset="-78"/>
                 <a:cs typeface="Amiri" pitchFamily="2" charset="-78"/>
               </a:rPr>
               <a:t>هَلْ تَذْهَبُ إِلَى الطَّبِيبِ كَثِيرًا؟</a:t>
@@ -16639,6 +16773,7 @@
                   <a:srgbClr val="1B3B6F"/>
                 </a:solidFill>
                 <a:latin typeface="Amiri" pitchFamily="2" charset="-78"/>
+                <a:ea typeface="Amiri" pitchFamily="2" charset="-78"/>
                 <a:cs typeface="Amiri" pitchFamily="2" charset="-78"/>
               </a:rPr>
               <a:t>يَعْتَنِي بِي … / تَعْتَنِي بِي …</a:t>
@@ -16715,6 +16850,7 @@
                   <a:srgbClr val="1B3B6F"/>
                 </a:solidFill>
                 <a:latin typeface="Amiri" pitchFamily="2" charset="-78"/>
+                <a:ea typeface="Amiri" pitchFamily="2" charset="-78"/>
                 <a:cs typeface="Amiri" pitchFamily="2" charset="-78"/>
               </a:rPr>
               <a:t>مَنْ يَعْتَنِي بِكَ عِنْدَمَا تَمْرَضُ؟</a:t>
@@ -16869,6 +17005,7 @@
                   <a:srgbClr val="1B3B6F"/>
                 </a:solidFill>
                 <a:latin typeface="Amiri" pitchFamily="2" charset="-78"/>
+                <a:ea typeface="Amiri" pitchFamily="2" charset="-78"/>
                 <a:cs typeface="Amiri" pitchFamily="2" charset="-78"/>
               </a:rPr>
               <a:t>عَفْوًا، هَلْ يُمْكِنُ أَنْ تُعِيدَ السُّؤَالَ؟</a:t>
@@ -17002,6 +17139,7 @@
                   <a:srgbClr val="D4AF37"/>
                 </a:solidFill>
                 <a:latin typeface="Amiri" pitchFamily="2" charset="-78"/>
+                <a:ea typeface="Amiri" pitchFamily="2" charset="-78"/>
                 <a:cs typeface="Amiri" pitchFamily="2" charset="-78"/>
               </a:rPr>
               <a:t>م</a:t>
@@ -17322,6 +17460,7 @@
                   <a:srgbClr val="8A6D1E"/>
                 </a:solidFill>
                 <a:latin typeface="Amiri" pitchFamily="2" charset="-78"/>
+                <a:ea typeface="Amiri" pitchFamily="2" charset="-78"/>
                 <a:cs typeface="Amiri" pitchFamily="2" charset="-78"/>
               </a:rPr>
               <a:t>تَجْرِبَتِي مَعَ المَرَضِ</a:t>
@@ -17602,6 +17741,7 @@
                   <a:srgbClr val="1B3B6F"/>
                 </a:solidFill>
                 <a:latin typeface="Amiri" pitchFamily="2" charset="-78"/>
+                <a:ea typeface="Amiri" pitchFamily="2" charset="-78"/>
                 <a:cs typeface="Amiri" pitchFamily="2" charset="-78"/>
               </a:rPr>
               <a:t>فِي … كَانَ عِنْدِي … وَبَقِيتُ …</a:t>
@@ -17678,6 +17818,7 @@
                   <a:srgbClr val="1B3B6F"/>
                 </a:solidFill>
                 <a:latin typeface="Amiri" pitchFamily="2" charset="-78"/>
+                <a:ea typeface="Amiri" pitchFamily="2" charset="-78"/>
                 <a:cs typeface="Amiri" pitchFamily="2" charset="-78"/>
               </a:rPr>
               <a:t>صِفْ آخِرَ مَرَّةٍ كُنْتَ فِيهَا مَرِيضًا.</a:t>
@@ -17781,6 +17922,7 @@
                   <a:srgbClr val="1B3B6F"/>
                 </a:solidFill>
                 <a:latin typeface="Amiri" pitchFamily="2" charset="-78"/>
+                <a:ea typeface="Amiri" pitchFamily="2" charset="-78"/>
                 <a:cs typeface="Amiri" pitchFamily="2" charset="-78"/>
               </a:rPr>
               <a:t>نَعَمْ، مَرَّةً وَقَعْتُ … فَآلَمَتْنِي …</a:t>
@@ -17857,6 +17999,7 @@
                   <a:srgbClr val="1B3B6F"/>
                 </a:solidFill>
                 <a:latin typeface="Amiri" pitchFamily="2" charset="-78"/>
+                <a:ea typeface="Amiri" pitchFamily="2" charset="-78"/>
                 <a:cs typeface="Amiri" pitchFamily="2" charset="-78"/>
               </a:rPr>
               <a:t>هَلْ جُرِحْتَ فِي الرِّيَاضَةِ مِنْ قَبْلُ؟</a:t>
@@ -17960,6 +18103,7 @@
                   <a:srgbClr val="1B3B6F"/>
                 </a:solidFill>
                 <a:latin typeface="Amiri" pitchFamily="2" charset="-78"/>
+                <a:ea typeface="Amiri" pitchFamily="2" charset="-78"/>
                 <a:cs typeface="Amiri" pitchFamily="2" charset="-78"/>
               </a:rPr>
               <a:t>يَجِبُ أَنْ … وَأَلَّا …</a:t>
@@ -18036,6 +18180,7 @@
                   <a:srgbClr val="1B3B6F"/>
                 </a:solidFill>
                 <a:latin typeface="Amiri" pitchFamily="2" charset="-78"/>
+                <a:ea typeface="Amiri" pitchFamily="2" charset="-78"/>
                 <a:cs typeface="Amiri" pitchFamily="2" charset="-78"/>
               </a:rPr>
               <a:t>مَاذَا يَجِبُ أَنْ يَفْعَلَ الطَّالِبُ المَرِيضُ؟</a:t>
@@ -18139,6 +18284,7 @@
                   <a:srgbClr val="1B3B6F"/>
                 </a:solidFill>
                 <a:latin typeface="Amiri" pitchFamily="2" charset="-78"/>
+                <a:ea typeface="Amiri" pitchFamily="2" charset="-78"/>
                 <a:cs typeface="Amiri" pitchFamily="2" charset="-78"/>
               </a:rPr>
               <a:t>فِي الشِّتَاءِ يُصَابُ النَّاسُ بِالزُّكَامِ …</a:t>
@@ -18215,6 +18361,7 @@
                   <a:srgbClr val="1B3B6F"/>
                 </a:solidFill>
                 <a:latin typeface="Amiri" pitchFamily="2" charset="-78"/>
+                <a:ea typeface="Amiri" pitchFamily="2" charset="-78"/>
                 <a:cs typeface="Amiri" pitchFamily="2" charset="-78"/>
               </a:rPr>
               <a:t>مَا الأَمْرَاضُ الشَّائِعَةُ فِي الشِّتَاءِ؟</a:t>
@@ -18318,6 +18465,7 @@
                   <a:srgbClr val="1B3B6F"/>
                 </a:solidFill>
                 <a:latin typeface="Amiri" pitchFamily="2" charset="-78"/>
+                <a:ea typeface="Amiri" pitchFamily="2" charset="-78"/>
                 <a:cs typeface="Amiri" pitchFamily="2" charset="-78"/>
               </a:rPr>
               <a:t>أَشْعُرُ بِالتَّعَبِ … وَلَا أَسْتَطِيعُ …</a:t>
@@ -18394,6 +18542,7 @@
                   <a:srgbClr val="1B3B6F"/>
                 </a:solidFill>
                 <a:latin typeface="Amiri" pitchFamily="2" charset="-78"/>
+                <a:ea typeface="Amiri" pitchFamily="2" charset="-78"/>
                 <a:cs typeface="Amiri" pitchFamily="2" charset="-78"/>
               </a:rPr>
               <a:t>كَيْفَ تَشْعُرُ عِنْدَمَا تَكُونُ مَرِيضًا؟</a:t>
@@ -18603,6 +18752,7 @@
                   <a:srgbClr val="D4AF37"/>
                 </a:solidFill>
                 <a:latin typeface="Amiri" pitchFamily="2" charset="-78"/>
+                <a:ea typeface="Amiri" pitchFamily="2" charset="-78"/>
                 <a:cs typeface="Amiri" pitchFamily="2" charset="-78"/>
               </a:rPr>
               <a:t>م</a:t>
@@ -18923,6 +19073,7 @@
                   <a:srgbClr val="8A6D1E"/>
                 </a:solidFill>
                 <a:latin typeface="Amiri" pitchFamily="2" charset="-78"/>
+                <a:ea typeface="Amiri" pitchFamily="2" charset="-78"/>
                 <a:cs typeface="Amiri" pitchFamily="2" charset="-78"/>
               </a:rPr>
               <a:t>الصِّحَّةُ وَالوِقَايَةُ</a:t>
@@ -19203,6 +19354,7 @@
                   <a:srgbClr val="1B3B6F"/>
                 </a:solidFill>
                 <a:latin typeface="Amiri" pitchFamily="2" charset="-78"/>
+                <a:ea typeface="Amiri" pitchFamily="2" charset="-78"/>
                 <a:cs typeface="Amiri" pitchFamily="2" charset="-78"/>
               </a:rPr>
               <a:t>أَعْتَقِدُ أَنَّ الوِقَايَةَ … لِأَنَّ …</a:t>
@@ -19279,6 +19431,7 @@
                   <a:srgbClr val="1B3B6F"/>
                 </a:solidFill>
                 <a:latin typeface="Amiri" pitchFamily="2" charset="-78"/>
+                <a:ea typeface="Amiri" pitchFamily="2" charset="-78"/>
                 <a:cs typeface="Amiri" pitchFamily="2" charset="-78"/>
               </a:rPr>
               <a:t>هَلِ الوِقَايَةُ أَهَمُّ مِنَ العِلَاجِ؟</a:t>
@@ -19382,6 +19535,7 @@
                   <a:srgbClr val="1B3B6F"/>
                 </a:solidFill>
                 <a:latin typeface="Amiri" pitchFamily="2" charset="-78"/>
+                <a:ea typeface="Amiri" pitchFamily="2" charset="-78"/>
                 <a:cs typeface="Amiri" pitchFamily="2" charset="-78"/>
               </a:rPr>
               <a:t>نَعَمْ، بَعْضُهُمْ … خَوْفًا مِنْ …</a:t>
@@ -19458,6 +19612,7 @@
                   <a:srgbClr val="1B3B6F"/>
                 </a:solidFill>
                 <a:latin typeface="Amiri" pitchFamily="2" charset="-78"/>
+                <a:ea typeface="Amiri" pitchFamily="2" charset="-78"/>
                 <a:cs typeface="Amiri" pitchFamily="2" charset="-78"/>
               </a:rPr>
               <a:t>هَلْ يَذْهَبُ الطُّلَّابُ إِلَى المَدْرَسَةِ وَهُمْ مَرْضَى؟ لِمَاذَا؟</a:t>
@@ -19561,6 +19716,7 @@
                   <a:srgbClr val="1B3B6F"/>
                 </a:solidFill>
                 <a:latin typeface="Amiri" pitchFamily="2" charset="-78"/>
+                <a:ea typeface="Amiri" pitchFamily="2" charset="-78"/>
                 <a:cs typeface="Amiri" pitchFamily="2" charset="-78"/>
               </a:rPr>
               <a:t>فِي المَاضِي كَانَ … أَمَّا الآنَ فَيَبْحَثُونَ …</a:t>
@@ -19637,6 +19793,7 @@
                   <a:srgbClr val="1B3B6F"/>
                 </a:solidFill>
                 <a:latin typeface="Amiri" pitchFamily="2" charset="-78"/>
+                <a:ea typeface="Amiri" pitchFamily="2" charset="-78"/>
                 <a:cs typeface="Amiri" pitchFamily="2" charset="-78"/>
               </a:rPr>
               <a:t>كَيْفَ تَغَيَّرَ اهْتِمَامُ النَّاسِ بِالصِّحَّةِ؟</a:t>
@@ -19740,6 +19897,7 @@
                   <a:srgbClr val="1B3B6F"/>
                 </a:solidFill>
                 <a:latin typeface="Amiri" pitchFamily="2" charset="-78"/>
+                <a:ea typeface="Amiri" pitchFamily="2" charset="-78"/>
                 <a:cs typeface="Amiri" pitchFamily="2" charset="-78"/>
               </a:rPr>
               <a:t>صَحِيحٌ أَنَّهُ … غَيْرَ أَنَّ …</a:t>
@@ -19816,6 +19974,7 @@
                   <a:srgbClr val="1B3B6F"/>
                 </a:solidFill>
                 <a:latin typeface="Amiri" pitchFamily="2" charset="-78"/>
+                <a:ea typeface="Amiri" pitchFamily="2" charset="-78"/>
                 <a:cs typeface="Amiri" pitchFamily="2" charset="-78"/>
               </a:rPr>
               <a:t>هَلِ البَحْثُ عَنِ الأَعْرَاضِ فِي الإِنْتَرْنِتِ مُفِيدٌ؟</a:t>
@@ -19919,6 +20078,7 @@
                   <a:srgbClr val="1B3B6F"/>
                 </a:solidFill>
                 <a:latin typeface="Amiri" pitchFamily="2" charset="-78"/>
+                <a:ea typeface="Amiri" pitchFamily="2" charset="-78"/>
                 <a:cs typeface="Amiri" pitchFamily="2" charset="-78"/>
               </a:rPr>
               <a:t>لَوْ كُنْتُ طَبِيبًا، لَنَصَحْتُهُمْ بِأَنْ …</a:t>
@@ -19995,6 +20155,7 @@
                   <a:srgbClr val="1B3B6F"/>
                 </a:solidFill>
                 <a:latin typeface="Amiri" pitchFamily="2" charset="-78"/>
+                <a:ea typeface="Amiri" pitchFamily="2" charset="-78"/>
                 <a:cs typeface="Amiri" pitchFamily="2" charset="-78"/>
               </a:rPr>
               <a:t>لَوْ كُنْتَ طَبِيبًا، مَاذَا تَنْصَحُ الشَّبَابَ؟</a:t>
@@ -20204,6 +20365,7 @@
                   <a:srgbClr val="D4AF37"/>
                 </a:solidFill>
                 <a:latin typeface="Amiri" pitchFamily="2" charset="-78"/>
+                <a:ea typeface="Amiri" pitchFamily="2" charset="-78"/>
                 <a:cs typeface="Amiri" pitchFamily="2" charset="-78"/>
               </a:rPr>
               <a:t>م</a:t>
@@ -20524,6 +20686,7 @@
                   <a:srgbClr val="8A6D1E"/>
                 </a:solidFill>
                 <a:latin typeface="Amiri" pitchFamily="2" charset="-78"/>
+                <a:ea typeface="Amiri" pitchFamily="2" charset="-78"/>
                 <a:cs typeface="Amiri" pitchFamily="2" charset="-78"/>
               </a:rPr>
               <a:t>آدَابُ الصَّفِّ</a:t>
@@ -22055,6 +22218,7 @@
                   <a:srgbClr val="D4AF37"/>
                 </a:solidFill>
                 <a:latin typeface="Amiri" pitchFamily="2" charset="-78"/>
+                <a:ea typeface="Amiri" pitchFamily="2" charset="-78"/>
                 <a:cs typeface="Amiri" pitchFamily="2" charset="-78"/>
               </a:rPr>
               <a:t>م</a:t>
@@ -22375,6 +22539,7 @@
                   <a:srgbClr val="8A6D1E"/>
                 </a:solidFill>
                 <a:latin typeface="Amiri" pitchFamily="2" charset="-78"/>
+                <a:ea typeface="Amiri" pitchFamily="2" charset="-78"/>
                 <a:cs typeface="Amiri" pitchFamily="2" charset="-78"/>
               </a:rPr>
               <a:t>نَمُوذَجُ الإِجَابَةِ</a:t>
@@ -22617,6 +22782,7 @@
                   <a:srgbClr val="1B3B6F"/>
                 </a:solidFill>
                 <a:latin typeface="Amiri" pitchFamily="2" charset="-78"/>
+                <a:ea typeface="Amiri" pitchFamily="2" charset="-78"/>
                 <a:cs typeface="Amiri" pitchFamily="2" charset="-78"/>
               </a:rPr>
               <a:t>صِحَّتِي جَيِّدَةٌ اليَوْمَ، وَالحَمْدُ لِلّٰهِ.</a:t>
@@ -22693,6 +22859,7 @@
                   <a:srgbClr val="1B3B6F"/>
                 </a:solidFill>
                 <a:latin typeface="Amiri" pitchFamily="2" charset="-78"/>
+                <a:ea typeface="Amiri" pitchFamily="2" charset="-78"/>
                 <a:cs typeface="Amiri" pitchFamily="2" charset="-78"/>
               </a:rPr>
               <a:t>كَيْفَ صِحَّتُكَ اليَوْمَ؟</a:t>
@@ -22796,6 +22963,7 @@
                   <a:srgbClr val="1B3B6F"/>
                 </a:solidFill>
                 <a:latin typeface="Amiri" pitchFamily="2" charset="-78"/>
+                <a:ea typeface="Amiri" pitchFamily="2" charset="-78"/>
                 <a:cs typeface="Amiri" pitchFamily="2" charset="-78"/>
               </a:rPr>
               <a:t>كُنْتُ مَرِيضًا فِي الشَّهْرِ المَاضِي، وَكَانَ عِنْدِي زُكَامٌ.</a:t>
@@ -22872,6 +23040,7 @@
                   <a:srgbClr val="1B3B6F"/>
                 </a:solidFill>
                 <a:latin typeface="Amiri" pitchFamily="2" charset="-78"/>
+                <a:ea typeface="Amiri" pitchFamily="2" charset="-78"/>
                 <a:cs typeface="Amiri" pitchFamily="2" charset="-78"/>
               </a:rPr>
               <a:t>مَتَى كُنْتَ مَرِيضًا آخِرَ مَرَّةٍ؟</a:t>
@@ -22975,6 +23144,7 @@
                   <a:srgbClr val="1B3B6F"/>
                 </a:solidFill>
                 <a:latin typeface="Amiri" pitchFamily="2" charset="-78"/>
+                <a:ea typeface="Amiri" pitchFamily="2" charset="-78"/>
                 <a:cs typeface="Amiri" pitchFamily="2" charset="-78"/>
               </a:rPr>
               <a:t>عِنْدَمَا يُؤْلِمُنِي رَأْسِي، أَشْرَبُ المَاءَ وَأَنَامُ قَلِيلًا.</a:t>
@@ -23051,6 +23221,7 @@
                   <a:srgbClr val="1B3B6F"/>
                 </a:solidFill>
                 <a:latin typeface="Amiri" pitchFamily="2" charset="-78"/>
+                <a:ea typeface="Amiri" pitchFamily="2" charset="-78"/>
                 <a:cs typeface="Amiri" pitchFamily="2" charset="-78"/>
               </a:rPr>
               <a:t>مَاذَا تَفْعَلُ عِنْدَمَا يُؤْلِمُكَ رَأْسُكَ؟</a:t>
@@ -23154,6 +23325,7 @@
                   <a:srgbClr val="1B3B6F"/>
                 </a:solidFill>
                 <a:latin typeface="Amiri" pitchFamily="2" charset="-78"/>
+                <a:ea typeface="Amiri" pitchFamily="2" charset="-78"/>
                 <a:cs typeface="Amiri" pitchFamily="2" charset="-78"/>
               </a:rPr>
               <a:t>لَا، أَذْهَبُ إِلَى الطَّبِيبِ مَرَّةً فِي السَّنَةِ فَقَطْ.</a:t>
@@ -23230,6 +23402,7 @@
                   <a:srgbClr val="1B3B6F"/>
                 </a:solidFill>
                 <a:latin typeface="Amiri" pitchFamily="2" charset="-78"/>
+                <a:ea typeface="Amiri" pitchFamily="2" charset="-78"/>
                 <a:cs typeface="Amiri" pitchFamily="2" charset="-78"/>
               </a:rPr>
               <a:t>هَلْ تَذْهَبُ إِلَى الطَّبِيبِ كَثِيرًا؟</a:t>
@@ -23333,6 +23506,7 @@
                   <a:srgbClr val="1B3B6F"/>
                 </a:solidFill>
                 <a:latin typeface="Amiri" pitchFamily="2" charset="-78"/>
+                <a:ea typeface="Amiri" pitchFamily="2" charset="-78"/>
                 <a:cs typeface="Amiri" pitchFamily="2" charset="-78"/>
               </a:rPr>
               <a:t>تَعْتَنِي بِي أُمِّي، وَتَطْبُخُ لِي الشُّورْبَةَ.</a:t>
@@ -23409,6 +23583,7 @@
                   <a:srgbClr val="1B3B6F"/>
                 </a:solidFill>
                 <a:latin typeface="Amiri" pitchFamily="2" charset="-78"/>
+                <a:ea typeface="Amiri" pitchFamily="2" charset="-78"/>
                 <a:cs typeface="Amiri" pitchFamily="2" charset="-78"/>
               </a:rPr>
               <a:t>مَنْ يَعْتَنِي بِكَ عِنْدَمَا تَمْرَضُ؟</a:t>
@@ -23618,6 +23793,7 @@
                   <a:srgbClr val="D4AF37"/>
                 </a:solidFill>
                 <a:latin typeface="Amiri" pitchFamily="2" charset="-78"/>
+                <a:ea typeface="Amiri" pitchFamily="2" charset="-78"/>
                 <a:cs typeface="Amiri" pitchFamily="2" charset="-78"/>
               </a:rPr>
               <a:t>م</a:t>
@@ -23938,6 +24114,7 @@
                   <a:srgbClr val="8A6D1E"/>
                 </a:solidFill>
                 <a:latin typeface="Amiri" pitchFamily="2" charset="-78"/>
+                <a:ea typeface="Amiri" pitchFamily="2" charset="-78"/>
                 <a:cs typeface="Amiri" pitchFamily="2" charset="-78"/>
               </a:rPr>
               <a:t>نَمُوذَجُ الإِجَابَةِ</a:t>
@@ -24180,6 +24357,7 @@
                   <a:srgbClr val="1B3B6F"/>
                 </a:solidFill>
                 <a:latin typeface="Amiri" pitchFamily="2" charset="-78"/>
+                <a:ea typeface="Amiri" pitchFamily="2" charset="-78"/>
                 <a:cs typeface="Amiri" pitchFamily="2" charset="-78"/>
               </a:rPr>
               <a:t>فِي الشِّتَاءِ كَانَ عِنْدِي حُمَّى وَسُعَالٌ، وَبَقِيتُ فِي البَيْتِ ثَلَاثَةَ أَيَّامٍ.</a:t>
@@ -24256,6 +24434,7 @@
                   <a:srgbClr val="1B3B6F"/>
                 </a:solidFill>
                 <a:latin typeface="Amiri" pitchFamily="2" charset="-78"/>
+                <a:ea typeface="Amiri" pitchFamily="2" charset="-78"/>
                 <a:cs typeface="Amiri" pitchFamily="2" charset="-78"/>
               </a:rPr>
               <a:t>صِفْ آخِرَ مَرَّةٍ كُنْتَ فِيهَا مَرِيضًا.</a:t>
@@ -24359,6 +24538,7 @@
                   <a:srgbClr val="1B3B6F"/>
                 </a:solidFill>
                 <a:latin typeface="Amiri" pitchFamily="2" charset="-78"/>
+                <a:ea typeface="Amiri" pitchFamily="2" charset="-78"/>
                 <a:cs typeface="Amiri" pitchFamily="2" charset="-78"/>
               </a:rPr>
               <a:t>نَعَمْ، مَرَّةً وَقَعْتُ فِي مُبَارَاةِ كُرَةِ القَدَمِ، فَآلَمَتْنِي رِجْلِي أُسْبُوعَيْنِ.</a:t>
@@ -24435,6 +24615,7 @@
                   <a:srgbClr val="1B3B6F"/>
                 </a:solidFill>
                 <a:latin typeface="Amiri" pitchFamily="2" charset="-78"/>
+                <a:ea typeface="Amiri" pitchFamily="2" charset="-78"/>
                 <a:cs typeface="Amiri" pitchFamily="2" charset="-78"/>
               </a:rPr>
               <a:t>هَلْ جُرِحْتَ فِي الرِّيَاضَةِ مِنْ قَبْلُ؟</a:t>
@@ -24538,6 +24719,7 @@
                   <a:srgbClr val="1B3B6F"/>
                 </a:solidFill>
                 <a:latin typeface="Amiri" pitchFamily="2" charset="-78"/>
+                <a:ea typeface="Amiri" pitchFamily="2" charset="-78"/>
                 <a:cs typeface="Amiri" pitchFamily="2" charset="-78"/>
               </a:rPr>
               <a:t>يَجِبُ أَنْ يَبْقَى فِي البَيْتِ وَيَرْتَاحَ، وَأَلَّا يَأْتِيَ إِلَى المَدْرَسَةِ حَتَّى لَا يُعْدِيَ زُمَلَاءَهُ.</a:t>
@@ -24614,6 +24796,7 @@
                   <a:srgbClr val="1B3B6F"/>
                 </a:solidFill>
                 <a:latin typeface="Amiri" pitchFamily="2" charset="-78"/>
+                <a:ea typeface="Amiri" pitchFamily="2" charset="-78"/>
                 <a:cs typeface="Amiri" pitchFamily="2" charset="-78"/>
               </a:rPr>
               <a:t>مَاذَا يَجِبُ أَنْ يَفْعَلَ الطَّالِبُ المَرِيضُ؟</a:t>
@@ -24717,6 +24900,7 @@
                   <a:srgbClr val="1B3B6F"/>
                 </a:solidFill>
                 <a:latin typeface="Amiri" pitchFamily="2" charset="-78"/>
+                <a:ea typeface="Amiri" pitchFamily="2" charset="-78"/>
                 <a:cs typeface="Amiri" pitchFamily="2" charset="-78"/>
               </a:rPr>
               <a:t>فِي الشِّتَاءِ يُصَابُ كَثِيرٌ مِنَ النَّاسِ بِالزُّكَامِ وَالسُّعَالِ، لِأَنَّ الجَوَّ بَارِدٌ.</a:t>
@@ -24793,6 +24977,7 @@
                   <a:srgbClr val="1B3B6F"/>
                 </a:solidFill>
                 <a:latin typeface="Amiri" pitchFamily="2" charset="-78"/>
+                <a:ea typeface="Amiri" pitchFamily="2" charset="-78"/>
                 <a:cs typeface="Amiri" pitchFamily="2" charset="-78"/>
               </a:rPr>
               <a:t>مَا الأَمْرَاضُ الشَّائِعَةُ فِي الشِّتَاءِ؟</a:t>
@@ -24896,6 +25081,7 @@
                   <a:srgbClr val="1B3B6F"/>
                 </a:solidFill>
                 <a:latin typeface="Amiri" pitchFamily="2" charset="-78"/>
+                <a:ea typeface="Amiri" pitchFamily="2" charset="-78"/>
                 <a:cs typeface="Amiri" pitchFamily="2" charset="-78"/>
               </a:rPr>
               <a:t>أَشْعُرُ بِالتَّعَبِ وَالمَلَلِ، وَلَا أَسْتَطِيعُ أَنْ أُرَكِّزَ عَلَى أَيِّ شَيْءٍ.</a:t>
@@ -24972,6 +25158,7 @@
                   <a:srgbClr val="1B3B6F"/>
                 </a:solidFill>
                 <a:latin typeface="Amiri" pitchFamily="2" charset="-78"/>
+                <a:ea typeface="Amiri" pitchFamily="2" charset="-78"/>
                 <a:cs typeface="Amiri" pitchFamily="2" charset="-78"/>
               </a:rPr>
               <a:t>كَيْفَ تَشْعُرُ عِنْدَمَا تَكُونُ مَرِيضًا؟</a:t>
@@ -25181,6 +25368,7 @@
                   <a:srgbClr val="D4AF37"/>
                 </a:solidFill>
                 <a:latin typeface="Amiri" pitchFamily="2" charset="-78"/>
+                <a:ea typeface="Amiri" pitchFamily="2" charset="-78"/>
                 <a:cs typeface="Amiri" pitchFamily="2" charset="-78"/>
               </a:rPr>
               <a:t>م</a:t>
@@ -25501,6 +25689,7 @@
                   <a:srgbClr val="8A6D1E"/>
                 </a:solidFill>
                 <a:latin typeface="Amiri" pitchFamily="2" charset="-78"/>
+                <a:ea typeface="Amiri" pitchFamily="2" charset="-78"/>
                 <a:cs typeface="Amiri" pitchFamily="2" charset="-78"/>
               </a:rPr>
               <a:t>نَمُوذَجُ الإِجَابَةِ</a:t>
@@ -25743,6 +25932,7 @@
                   <a:srgbClr val="1B3B6F"/>
                 </a:solidFill>
                 <a:latin typeface="Amiri" pitchFamily="2" charset="-78"/>
+                <a:ea typeface="Amiri" pitchFamily="2" charset="-78"/>
                 <a:cs typeface="Amiri" pitchFamily="2" charset="-78"/>
               </a:rPr>
               <a:t>أَعْتَقِدُ أَنَّ الوِقَايَةَ أَهَمُّ، لِأَنَّ غَسْلَ اليَدَيْنِ وَالنَّوْمَ الجَيِّدَ يَحْمِيَانِنَا مِنْ أَمْرَاضٍ كَثِيرَةٍ.</a:t>
@@ -25819,6 +26009,7 @@
                   <a:srgbClr val="1B3B6F"/>
                 </a:solidFill>
                 <a:latin typeface="Amiri" pitchFamily="2" charset="-78"/>
+                <a:ea typeface="Amiri" pitchFamily="2" charset="-78"/>
                 <a:cs typeface="Amiri" pitchFamily="2" charset="-78"/>
               </a:rPr>
               <a:t>هَلِ الوِقَايَةُ أَهَمُّ مِنَ العِلَاجِ؟</a:t>
@@ -25922,6 +26113,7 @@
                   <a:srgbClr val="1B3B6F"/>
                 </a:solidFill>
                 <a:latin typeface="Amiri" pitchFamily="2" charset="-78"/>
+                <a:ea typeface="Amiri" pitchFamily="2" charset="-78"/>
                 <a:cs typeface="Amiri" pitchFamily="2" charset="-78"/>
               </a:rPr>
               <a:t>نَعَمْ، بَعْضُهُمْ يَأْتُونَ وَهُمْ مَرْضَى خَوْفًا مِنْ أَنْ تَفُوتَهُمُ الدُّرُوسُ، وَهٰذَا يَنْشُرُ المَرَضَ.</a:t>
@@ -26001,6 +26193,7 @@
                   <a:srgbClr val="1B3B6F"/>
                 </a:solidFill>
                 <a:latin typeface="Amiri" pitchFamily="2" charset="-78"/>
+                <a:ea typeface="Amiri" pitchFamily="2" charset="-78"/>
                 <a:cs typeface="Amiri" pitchFamily="2" charset="-78"/>
               </a:rPr>
               <a:t>هَلْ يَذْهَبُ الطُّلَّابُ إِلَى المَدْرَسَةِ وَهُمْ مَرْضَى؟ لِمَاذَا؟</a:t>
@@ -26104,6 +26297,7 @@
                   <a:srgbClr val="1B3B6F"/>
                 </a:solidFill>
                 <a:latin typeface="Amiri" pitchFamily="2" charset="-78"/>
+                <a:ea typeface="Amiri" pitchFamily="2" charset="-78"/>
                 <a:cs typeface="Amiri" pitchFamily="2" charset="-78"/>
               </a:rPr>
               <a:t>فِي المَاضِي كَانَ النَّاسُ يَذْهَبُونَ إِلَى الطَّبِيبِ مُتَأَخِّرِينَ، أَمَّا الآنَ فَيَبْحَثُونَ عَنِ الأَعْرَاضِ فِي الإِنْتَرْنِتِ أَوَّلًا.</a:t>
@@ -26180,6 +26374,7 @@
                   <a:srgbClr val="1B3B6F"/>
                 </a:solidFill>
                 <a:latin typeface="Amiri" pitchFamily="2" charset="-78"/>
+                <a:ea typeface="Amiri" pitchFamily="2" charset="-78"/>
                 <a:cs typeface="Amiri" pitchFamily="2" charset="-78"/>
               </a:rPr>
               <a:t>كَيْفَ تَغَيَّرَ اهْتِمَامُ النَّاسِ بِالصِّحَّةِ؟</a:t>
@@ -26389,6 +26584,7 @@
                   <a:srgbClr val="D4AF37"/>
                 </a:solidFill>
                 <a:latin typeface="Amiri" pitchFamily="2" charset="-78"/>
+                <a:ea typeface="Amiri" pitchFamily="2" charset="-78"/>
                 <a:cs typeface="Amiri" pitchFamily="2" charset="-78"/>
               </a:rPr>
               <a:t>م</a:t>
@@ -26709,6 +26905,7 @@
                   <a:srgbClr val="8A6D1E"/>
                 </a:solidFill>
                 <a:latin typeface="Amiri" pitchFamily="2" charset="-78"/>
+                <a:ea typeface="Amiri" pitchFamily="2" charset="-78"/>
                 <a:cs typeface="Amiri" pitchFamily="2" charset="-78"/>
               </a:rPr>
               <a:t>نَمُوذَجُ الإِجَابَةِ</a:t>
@@ -26951,6 +27148,7 @@
                   <a:srgbClr val="1B3B6F"/>
                 </a:solidFill>
                 <a:latin typeface="Amiri" pitchFamily="2" charset="-78"/>
+                <a:ea typeface="Amiri" pitchFamily="2" charset="-78"/>
                 <a:cs typeface="Amiri" pitchFamily="2" charset="-78"/>
               </a:rPr>
               <a:t>صَحِيحٌ أَنَّهُ سَرِيعٌ وَسَهْلٌ، غَيْرَ أَنَّ المَعْلُومَاتِ أَحْيَانًا خَاطِئَةٌ وَتُخِيفُ المَرِيضَ بِلَا سَبَبٍ.</a:t>
@@ -27027,6 +27225,7 @@
                   <a:srgbClr val="1B3B6F"/>
                 </a:solidFill>
                 <a:latin typeface="Amiri" pitchFamily="2" charset="-78"/>
+                <a:ea typeface="Amiri" pitchFamily="2" charset="-78"/>
                 <a:cs typeface="Amiri" pitchFamily="2" charset="-78"/>
               </a:rPr>
               <a:t>هَلِ البَحْثُ عَنِ الأَعْرَاضِ فِي الإِنْتَرْنِتِ مُفِيدٌ؟</a:t>
@@ -27130,6 +27329,7 @@
                   <a:srgbClr val="1B3B6F"/>
                 </a:solidFill>
                 <a:latin typeface="Amiri" pitchFamily="2" charset="-78"/>
+                <a:ea typeface="Amiri" pitchFamily="2" charset="-78"/>
                 <a:cs typeface="Amiri" pitchFamily="2" charset="-78"/>
               </a:rPr>
               <a:t>لَوْ كُنْتُ طَبِيبًا، لَنَصَحْتُهُمْ بِأَنْ يَنَامُوا جَيِّدًا، وَأَنْ يَتْرُكُوا الهَاتِفَ سَاعَةً قَبْلَ النَّوْمِ.</a:t>
@@ -27206,6 +27406,7 @@
                   <a:srgbClr val="1B3B6F"/>
                 </a:solidFill>
                 <a:latin typeface="Amiri" pitchFamily="2" charset="-78"/>
+                <a:ea typeface="Amiri" pitchFamily="2" charset="-78"/>
                 <a:cs typeface="Amiri" pitchFamily="2" charset="-78"/>
               </a:rPr>
               <a:t>لَوْ كُنْتَ طَبِيبًا، مَاذَا تَنْصَحُ الشَّبَابَ؟</a:t>
@@ -27415,6 +27616,7 @@
                   <a:srgbClr val="D4AF37"/>
                 </a:solidFill>
                 <a:latin typeface="Amiri" pitchFamily="2" charset="-78"/>
+                <a:ea typeface="Amiri" pitchFamily="2" charset="-78"/>
                 <a:cs typeface="Amiri" pitchFamily="2" charset="-78"/>
               </a:rPr>
               <a:t>م</a:t>
@@ -27735,6 +27937,7 @@
                   <a:srgbClr val="8A6D1E"/>
                 </a:solidFill>
                 <a:latin typeface="Amiri" pitchFamily="2" charset="-78"/>
+                <a:ea typeface="Amiri" pitchFamily="2" charset="-78"/>
                 <a:cs typeface="Amiri" pitchFamily="2" charset="-78"/>
               </a:rPr>
               <a:t>قَيِّمْ عَمَلَكَ</a:t>
@@ -28979,6 +29182,7 @@
                   <a:srgbClr val="FFFFFF"/>
                 </a:solidFill>
                 <a:latin typeface="Amiri" pitchFamily="2" charset="-78"/>
+                <a:ea typeface="Amiri" pitchFamily="2" charset="-78"/>
                 <a:cs typeface="Amiri" pitchFamily="2" charset="-78"/>
               </a:rPr>
               <a:t>أَحْسَنْتُمْ! إِلَى اللِّقَاءِ</a:t>
@@ -29131,6 +29335,7 @@
                   <a:srgbClr val="D4AF37"/>
                 </a:solidFill>
                 <a:latin typeface="Amiri" pitchFamily="2" charset="-78"/>
+                <a:ea typeface="Amiri" pitchFamily="2" charset="-78"/>
                 <a:cs typeface="Amiri" pitchFamily="2" charset="-78"/>
               </a:rPr>
               <a:t>وَرْشَةُ الكِتَابَةِ</a:t>
@@ -29264,6 +29469,7 @@
                   <a:srgbClr val="D4AF37"/>
                 </a:solidFill>
                 <a:latin typeface="Amiri" pitchFamily="2" charset="-78"/>
+                <a:ea typeface="Amiri" pitchFamily="2" charset="-78"/>
                 <a:cs typeface="Amiri" pitchFamily="2" charset="-78"/>
               </a:rPr>
               <a:t>م</a:t>
@@ -29584,6 +29790,7 @@
                   <a:srgbClr val="8A6D1E"/>
                 </a:solidFill>
                 <a:latin typeface="Amiri" pitchFamily="2" charset="-78"/>
+                <a:ea typeface="Amiri" pitchFamily="2" charset="-78"/>
                 <a:cs typeface="Amiri" pitchFamily="2" charset="-78"/>
               </a:rPr>
               <a:t>خَرِيطَةُ الوَرْشَةِ</a:t>
@@ -29898,6 +30105,7 @@
                   <a:srgbClr val="1B3B6F"/>
                 </a:solidFill>
                 <a:latin typeface="Amiri" pitchFamily="2" charset="-78"/>
+                <a:ea typeface="Amiri" pitchFamily="2" charset="-78"/>
                 <a:cs typeface="Amiri" pitchFamily="2" charset="-78"/>
               </a:rPr>
               <a:t>كَيْفَ</a:t>
@@ -30174,6 +30382,7 @@
                   <a:srgbClr val="1E6B52"/>
                 </a:solidFill>
                 <a:latin typeface="Amiri" pitchFamily="2" charset="-78"/>
+                <a:ea typeface="Amiri" pitchFamily="2" charset="-78"/>
                 <a:cs typeface="Amiri" pitchFamily="2" charset="-78"/>
               </a:rPr>
               <a:t>تَمْثِيلُ الدَّوْرِ</a:t>
@@ -30450,6 +30659,7 @@
                   <a:srgbClr val="8A6D1E"/>
                 </a:solidFill>
                 <a:latin typeface="Amiri" pitchFamily="2" charset="-78"/>
+                <a:ea typeface="Amiri" pitchFamily="2" charset="-78"/>
                 <a:cs typeface="Amiri" pitchFamily="2" charset="-78"/>
               </a:rPr>
               <a:t>النَّمُوذَجُ</a:t>
@@ -30726,6 +30936,7 @@
                   <a:srgbClr val="1E6B52"/>
                 </a:solidFill>
                 <a:latin typeface="Amiri" pitchFamily="2" charset="-78"/>
+                <a:ea typeface="Amiri" pitchFamily="2" charset="-78"/>
                 <a:cs typeface="Amiri" pitchFamily="2" charset="-78"/>
               </a:rPr>
               <a:t>المُحَادَثَةُ</a:t>
@@ -31002,6 +31213,7 @@
                   <a:srgbClr val="8A6D1E"/>
                 </a:solidFill>
                 <a:latin typeface="Amiri" pitchFamily="2" charset="-78"/>
+                <a:ea typeface="Amiri" pitchFamily="2" charset="-78"/>
                 <a:cs typeface="Amiri" pitchFamily="2" charset="-78"/>
               </a:rPr>
               <a:t>قَيِّمْ</a:t>
@@ -31245,6 +31457,7 @@
                   <a:srgbClr val="D4AF37"/>
                 </a:solidFill>
                 <a:latin typeface="Amiri" pitchFamily="2" charset="-78"/>
+                <a:ea typeface="Amiri" pitchFamily="2" charset="-78"/>
                 <a:cs typeface="Amiri" pitchFamily="2" charset="-78"/>
               </a:rPr>
               <a:t>م</a:t>
@@ -31565,6 +31778,7 @@
                   <a:srgbClr val="8A6D1E"/>
                 </a:solidFill>
                 <a:latin typeface="Amiri" pitchFamily="2" charset="-78"/>
+                <a:ea typeface="Amiri" pitchFamily="2" charset="-78"/>
                 <a:cs typeface="Amiri" pitchFamily="2" charset="-78"/>
               </a:rPr>
               <a:t>امْتِحَانُ التَّحَدُّثِ</a:t>
@@ -32189,6 +32403,7 @@
                   <a:srgbClr val="1B3B6F"/>
                 </a:solidFill>
                 <a:latin typeface="Amiri" pitchFamily="2" charset="-78"/>
+                <a:ea typeface="Amiri" pitchFamily="2" charset="-78"/>
                 <a:cs typeface="Amiri" pitchFamily="2" charset="-78"/>
               </a:rPr>
               <a:t>عَفْوًا، هَلْ يُمْكِنُ أَنْ تُعِيدَ السُّؤَالَ؟</a:t>
@@ -32288,6 +32503,7 @@
                   <a:srgbClr val="1B3B6F"/>
                 </a:solidFill>
                 <a:latin typeface="Amiri" pitchFamily="2" charset="-78"/>
+                <a:ea typeface="Amiri" pitchFamily="2" charset="-78"/>
                 <a:cs typeface="Amiri" pitchFamily="2" charset="-78"/>
               </a:rPr>
               <a:t>لَحْظَةً، دَعْنِي أُفَكِّرُ …</a:t>
@@ -32387,6 +32603,7 @@
                   <a:srgbClr val="1B3B6F"/>
                 </a:solidFill>
                 <a:latin typeface="Amiri" pitchFamily="2" charset="-78"/>
+                <a:ea typeface="Amiri" pitchFamily="2" charset="-78"/>
                 <a:cs typeface="Amiri" pitchFamily="2" charset="-78"/>
               </a:rPr>
               <a:t>أَقْصِدُ …</a:t>
@@ -32558,6 +32775,7 @@
                   <a:srgbClr val="D4AF37"/>
                 </a:solidFill>
                 <a:latin typeface="Amiri" pitchFamily="2" charset="-78"/>
+                <a:ea typeface="Amiri" pitchFamily="2" charset="-78"/>
                 <a:cs typeface="Amiri" pitchFamily="2" charset="-78"/>
               </a:rPr>
               <a:t>م</a:t>
@@ -32878,6 +33096,7 @@
                   <a:srgbClr val="8A6D1E"/>
                 </a:solidFill>
                 <a:latin typeface="Amiri" pitchFamily="2" charset="-78"/>
+                <a:ea typeface="Amiri" pitchFamily="2" charset="-78"/>
                 <a:cs typeface="Amiri" pitchFamily="2" charset="-78"/>
               </a:rPr>
               <a:t>أَيْنَ الأَلَمُ؟</a:t>
@@ -33181,6 +33400,7 @@
                   <a:srgbClr val="1B3B6F"/>
                 </a:solidFill>
                 <a:latin typeface="Amiri" pitchFamily="2" charset="-78"/>
+                <a:ea typeface="Amiri" pitchFamily="2" charset="-78"/>
                 <a:cs typeface="Amiri" pitchFamily="2" charset="-78"/>
               </a:rPr>
               <a:t>رَأْسٌ</a:t>
@@ -33338,6 +33558,7 @@
                   <a:srgbClr val="1B3B6F"/>
                 </a:solidFill>
                 <a:latin typeface="Amiri" pitchFamily="2" charset="-78"/>
+                <a:ea typeface="Amiri" pitchFamily="2" charset="-78"/>
                 <a:cs typeface="Amiri" pitchFamily="2" charset="-78"/>
               </a:rPr>
               <a:t>رَأْسُهَا</a:t>
@@ -33441,6 +33662,7 @@
                   <a:srgbClr val="1B3B6F"/>
                 </a:solidFill>
                 <a:latin typeface="Amiri" pitchFamily="2" charset="-78"/>
+                <a:ea typeface="Amiri" pitchFamily="2" charset="-78"/>
                 <a:cs typeface="Amiri" pitchFamily="2" charset="-78"/>
               </a:rPr>
               <a:t>رَأْسُهُ</a:t>
@@ -33544,6 +33766,7 @@
                   <a:srgbClr val="1B3B6F"/>
                 </a:solidFill>
                 <a:latin typeface="Amiri" pitchFamily="2" charset="-78"/>
+                <a:ea typeface="Amiri" pitchFamily="2" charset="-78"/>
                 <a:cs typeface="Amiri" pitchFamily="2" charset="-78"/>
               </a:rPr>
               <a:t>رَأْسِي</a:t>
@@ -33809,6 +34032,7 @@
                   <a:srgbClr val="1B3B6F"/>
                 </a:solidFill>
                 <a:latin typeface="Amiri" pitchFamily="2" charset="-78"/>
+                <a:ea typeface="Amiri" pitchFamily="2" charset="-78"/>
                 <a:cs typeface="Amiri" pitchFamily="2" charset="-78"/>
               </a:rPr>
               <a:t>بَطْنٌ</a:t>
@@ -33966,6 +34190,7 @@
                   <a:srgbClr val="1B3B6F"/>
                 </a:solidFill>
                 <a:latin typeface="Amiri" pitchFamily="2" charset="-78"/>
+                <a:ea typeface="Amiri" pitchFamily="2" charset="-78"/>
                 <a:cs typeface="Amiri" pitchFamily="2" charset="-78"/>
               </a:rPr>
               <a:t>بَطْنُهَا</a:t>
@@ -34069,6 +34294,7 @@
                   <a:srgbClr val="1B3B6F"/>
                 </a:solidFill>
                 <a:latin typeface="Amiri" pitchFamily="2" charset="-78"/>
+                <a:ea typeface="Amiri" pitchFamily="2" charset="-78"/>
                 <a:cs typeface="Amiri" pitchFamily="2" charset="-78"/>
               </a:rPr>
               <a:t>بَطْنُهُ</a:t>
@@ -34172,6 +34398,7 @@
                   <a:srgbClr val="1B3B6F"/>
                 </a:solidFill>
                 <a:latin typeface="Amiri" pitchFamily="2" charset="-78"/>
+                <a:ea typeface="Amiri" pitchFamily="2" charset="-78"/>
                 <a:cs typeface="Amiri" pitchFamily="2" charset="-78"/>
               </a:rPr>
               <a:t>بَطْنِي</a:t>
@@ -34437,6 +34664,7 @@
                   <a:srgbClr val="1B3B6F"/>
                 </a:solidFill>
                 <a:latin typeface="Amiri" pitchFamily="2" charset="-78"/>
+                <a:ea typeface="Amiri" pitchFamily="2" charset="-78"/>
                 <a:cs typeface="Amiri" pitchFamily="2" charset="-78"/>
               </a:rPr>
               <a:t>ظَهْرٌ</a:t>
@@ -34594,6 +34822,7 @@
                   <a:srgbClr val="1B3B6F"/>
                 </a:solidFill>
                 <a:latin typeface="Amiri" pitchFamily="2" charset="-78"/>
+                <a:ea typeface="Amiri" pitchFamily="2" charset="-78"/>
                 <a:cs typeface="Amiri" pitchFamily="2" charset="-78"/>
               </a:rPr>
               <a:t>ظَهْرُهَا</a:t>
@@ -34697,6 +34926,7 @@
                   <a:srgbClr val="1B3B6F"/>
                 </a:solidFill>
                 <a:latin typeface="Amiri" pitchFamily="2" charset="-78"/>
+                <a:ea typeface="Amiri" pitchFamily="2" charset="-78"/>
                 <a:cs typeface="Amiri" pitchFamily="2" charset="-78"/>
               </a:rPr>
               <a:t>ظَهْرُهُ</a:t>
@@ -34800,6 +35030,7 @@
                   <a:srgbClr val="1B3B6F"/>
                 </a:solidFill>
                 <a:latin typeface="Amiri" pitchFamily="2" charset="-78"/>
+                <a:ea typeface="Amiri" pitchFamily="2" charset="-78"/>
                 <a:cs typeface="Amiri" pitchFamily="2" charset="-78"/>
               </a:rPr>
               <a:t>ظَهْرِي</a:t>
@@ -35065,6 +35296,7 @@
                   <a:srgbClr val="1B3B6F"/>
                 </a:solidFill>
                 <a:latin typeface="Amiri" pitchFamily="2" charset="-78"/>
+                <a:ea typeface="Amiri" pitchFamily="2" charset="-78"/>
                 <a:cs typeface="Amiri" pitchFamily="2" charset="-78"/>
               </a:rPr>
               <a:t>يَدٌ · رِجْلٌ</a:t>
@@ -35222,6 +35454,7 @@
                   <a:srgbClr val="1B3B6F"/>
                 </a:solidFill>
                 <a:latin typeface="Amiri" pitchFamily="2" charset="-78"/>
+                <a:ea typeface="Amiri" pitchFamily="2" charset="-78"/>
                 <a:cs typeface="Amiri" pitchFamily="2" charset="-78"/>
               </a:rPr>
               <a:t>يَدِي · رِجْلِي</a:t>
@@ -35325,6 +35558,7 @@
                   <a:srgbClr val="1B3B6F"/>
                 </a:solidFill>
                 <a:latin typeface="Amiri" pitchFamily="2" charset="-78"/>
+                <a:ea typeface="Amiri" pitchFamily="2" charset="-78"/>
                 <a:cs typeface="Amiri" pitchFamily="2" charset="-78"/>
               </a:rPr>
               <a:t>أَيْدٍ · أَرْجُلٌ</a:t>
@@ -35590,6 +35824,7 @@
                   <a:srgbClr val="1B3B6F"/>
                 </a:solidFill>
                 <a:latin typeface="Amiri" pitchFamily="2" charset="-78"/>
+                <a:ea typeface="Amiri" pitchFamily="2" charset="-78"/>
                 <a:cs typeface="Amiri" pitchFamily="2" charset="-78"/>
               </a:rPr>
               <a:t>يُؤْلِمُنِي …</a:t>
@@ -35747,6 +35982,7 @@
                   <a:srgbClr val="1B3B6F"/>
                 </a:solidFill>
                 <a:latin typeface="Amiri" pitchFamily="2" charset="-78"/>
+                <a:ea typeface="Amiri" pitchFamily="2" charset="-78"/>
                 <a:cs typeface="Amiri" pitchFamily="2" charset="-78"/>
               </a:rPr>
               <a:t>تُؤْلِمُنِي يَدِي</a:t>
@@ -35850,6 +36086,7 @@
                   <a:srgbClr val="1B3B6F"/>
                 </a:solidFill>
                 <a:latin typeface="Amiri" pitchFamily="2" charset="-78"/>
+                <a:ea typeface="Amiri" pitchFamily="2" charset="-78"/>
                 <a:cs typeface="Amiri" pitchFamily="2" charset="-78"/>
               </a:rPr>
               <a:t>يُؤْلِمُنِي رَأْسِي</a:t>
@@ -36115,6 +36352,7 @@
                   <a:srgbClr val="1B3B6F"/>
                 </a:solidFill>
                 <a:latin typeface="Amiri" pitchFamily="2" charset="-78"/>
+                <a:ea typeface="Amiri" pitchFamily="2" charset="-78"/>
                 <a:cs typeface="Amiri" pitchFamily="2" charset="-78"/>
               </a:rPr>
               <a:t>عِنْدِي …</a:t>
@@ -36272,6 +36510,7 @@
                   <a:srgbClr val="1B3B6F"/>
                 </a:solidFill>
                 <a:latin typeface="Amiri" pitchFamily="2" charset="-78"/>
+                <a:ea typeface="Amiri" pitchFamily="2" charset="-78"/>
                 <a:cs typeface="Amiri" pitchFamily="2" charset="-78"/>
               </a:rPr>
               <a:t>عِنْدَهُ · عِنْدَهَا</a:t>
@@ -36375,6 +36614,7 @@
                   <a:srgbClr val="1B3B6F"/>
                 </a:solidFill>
                 <a:latin typeface="Amiri" pitchFamily="2" charset="-78"/>
+                <a:ea typeface="Amiri" pitchFamily="2" charset="-78"/>
                 <a:cs typeface="Amiri" pitchFamily="2" charset="-78"/>
               </a:rPr>
               <a:t>عِنْدَكِ</a:t>
@@ -36478,6 +36718,7 @@
                   <a:srgbClr val="1B3B6F"/>
                 </a:solidFill>
                 <a:latin typeface="Amiri" pitchFamily="2" charset="-78"/>
+                <a:ea typeface="Amiri" pitchFamily="2" charset="-78"/>
                 <a:cs typeface="Amiri" pitchFamily="2" charset="-78"/>
               </a:rPr>
               <a:t>عِنْدَكَ</a:t>
@@ -36611,6 +36852,7 @@
                   <a:srgbClr val="D4AF37"/>
                 </a:solidFill>
                 <a:latin typeface="Amiri" pitchFamily="2" charset="-78"/>
+                <a:ea typeface="Amiri" pitchFamily="2" charset="-78"/>
                 <a:cs typeface="Amiri" pitchFamily="2" charset="-78"/>
               </a:rPr>
               <a:t>م</a:t>
@@ -36931,6 +37173,7 @@
                   <a:srgbClr val="8A6D1E"/>
                 </a:solidFill>
                 <a:latin typeface="Amiri" pitchFamily="2" charset="-78"/>
+                <a:ea typeface="Amiri" pitchFamily="2" charset="-78"/>
                 <a:cs typeface="Amiri" pitchFamily="2" charset="-78"/>
               </a:rPr>
               <a:t>الأَعْرَاضُ</a:t>
@@ -37234,6 +37477,7 @@
                   <a:srgbClr val="1B3B6F"/>
                 </a:solidFill>
                 <a:latin typeface="Amiri" pitchFamily="2" charset="-78"/>
+                <a:ea typeface="Amiri" pitchFamily="2" charset="-78"/>
                 <a:cs typeface="Amiri" pitchFamily="2" charset="-78"/>
               </a:rPr>
               <a:t>صُدَاعٌ</a:t>
@@ -37553,6 +37797,7 @@
                   <a:srgbClr val="1B3B6F"/>
                 </a:solidFill>
                 <a:latin typeface="Amiri" pitchFamily="2" charset="-78"/>
+                <a:ea typeface="Amiri" pitchFamily="2" charset="-78"/>
                 <a:cs typeface="Amiri" pitchFamily="2" charset="-78"/>
               </a:rPr>
               <a:t>حُمَّى · زُكَامٌ · سُعَالٌ</a:t>
@@ -37872,6 +38117,7 @@
                   <a:srgbClr val="1B3B6F"/>
                 </a:solidFill>
                 <a:latin typeface="Amiri" pitchFamily="2" charset="-78"/>
+                <a:ea typeface="Amiri" pitchFamily="2" charset="-78"/>
                 <a:cs typeface="Amiri" pitchFamily="2" charset="-78"/>
               </a:rPr>
               <a:t>مَرِيضٌ</a:t>
@@ -38029,6 +38275,7 @@
                   <a:srgbClr val="1B3B6F"/>
                 </a:solidFill>
                 <a:latin typeface="Amiri" pitchFamily="2" charset="-78"/>
+                <a:ea typeface="Amiri" pitchFamily="2" charset="-78"/>
                 <a:cs typeface="Amiri" pitchFamily="2" charset="-78"/>
               </a:rPr>
               <a:t>مَرْضَى</a:t>
@@ -38132,6 +38379,7 @@
                   <a:srgbClr val="1B3B6F"/>
                 </a:solidFill>
                 <a:latin typeface="Amiri" pitchFamily="2" charset="-78"/>
+                <a:ea typeface="Amiri" pitchFamily="2" charset="-78"/>
                 <a:cs typeface="Amiri" pitchFamily="2" charset="-78"/>
               </a:rPr>
               <a:t>مَرِيضَةٌ</a:t>
@@ -38235,6 +38483,7 @@
                   <a:srgbClr val="1B3B6F"/>
                 </a:solidFill>
                 <a:latin typeface="Amiri" pitchFamily="2" charset="-78"/>
+                <a:ea typeface="Amiri" pitchFamily="2" charset="-78"/>
                 <a:cs typeface="Amiri" pitchFamily="2" charset="-78"/>
               </a:rPr>
               <a:t>مَرِيضٌ</a:t>
@@ -38500,6 +38749,7 @@
                   <a:srgbClr val="1B3B6F"/>
                 </a:solidFill>
                 <a:latin typeface="Amiri" pitchFamily="2" charset="-78"/>
+                <a:ea typeface="Amiri" pitchFamily="2" charset="-78"/>
                 <a:cs typeface="Amiri" pitchFamily="2" charset="-78"/>
               </a:rPr>
               <a:t>مُتْعَبٌ</a:t>
@@ -38657,6 +38907,7 @@
                   <a:srgbClr val="1B3B6F"/>
                 </a:solidFill>
                 <a:latin typeface="Amiri" pitchFamily="2" charset="-78"/>
+                <a:ea typeface="Amiri" pitchFamily="2" charset="-78"/>
                 <a:cs typeface="Amiri" pitchFamily="2" charset="-78"/>
               </a:rPr>
               <a:t>مُتْعَبُونَ</a:t>
@@ -38760,6 +39011,7 @@
                   <a:srgbClr val="1B3B6F"/>
                 </a:solidFill>
                 <a:latin typeface="Amiri" pitchFamily="2" charset="-78"/>
+                <a:ea typeface="Amiri" pitchFamily="2" charset="-78"/>
                 <a:cs typeface="Amiri" pitchFamily="2" charset="-78"/>
               </a:rPr>
               <a:t>مُتْعَبَةٌ</a:t>
@@ -38863,6 +39115,7 @@
                   <a:srgbClr val="1B3B6F"/>
                 </a:solidFill>
                 <a:latin typeface="Amiri" pitchFamily="2" charset="-78"/>
+                <a:ea typeface="Amiri" pitchFamily="2" charset="-78"/>
                 <a:cs typeface="Amiri" pitchFamily="2" charset="-78"/>
               </a:rPr>
               <a:t>مُتْعَبٌ</a:t>
@@ -39128,6 +39381,7 @@
                   <a:srgbClr val="1B3B6F"/>
                 </a:solidFill>
                 <a:latin typeface="Amiri" pitchFamily="2" charset="-78"/>
+                <a:ea typeface="Amiri" pitchFamily="2" charset="-78"/>
                 <a:cs typeface="Amiri" pitchFamily="2" charset="-78"/>
               </a:rPr>
               <a:t>مُنْذُ …</a:t>
@@ -39447,6 +39701,7 @@
                   <a:srgbClr val="1B3B6F"/>
                 </a:solidFill>
                 <a:latin typeface="Amiri" pitchFamily="2" charset="-78"/>
+                <a:ea typeface="Amiri" pitchFamily="2" charset="-78"/>
                 <a:cs typeface="Amiri" pitchFamily="2" charset="-78"/>
               </a:rPr>
               <a:t>أَشْعُرُ بِالتَّعَبِ</a:t>
@@ -39604,6 +39859,7 @@
                   <a:srgbClr val="1B3B6F"/>
                 </a:solidFill>
                 <a:latin typeface="Amiri" pitchFamily="2" charset="-78"/>
+                <a:ea typeface="Amiri" pitchFamily="2" charset="-78"/>
                 <a:cs typeface="Amiri" pitchFamily="2" charset="-78"/>
               </a:rPr>
               <a:t>يَشْعُرُونَ</a:t>
@@ -39707,6 +39963,7 @@
                   <a:srgbClr val="1B3B6F"/>
                 </a:solidFill>
                 <a:latin typeface="Amiri" pitchFamily="2" charset="-78"/>
+                <a:ea typeface="Amiri" pitchFamily="2" charset="-78"/>
                 <a:cs typeface="Amiri" pitchFamily="2" charset="-78"/>
               </a:rPr>
               <a:t>تَشْعُرُ</a:t>
@@ -39810,6 +40067,7 @@
                   <a:srgbClr val="1B3B6F"/>
                 </a:solidFill>
                 <a:latin typeface="Amiri" pitchFamily="2" charset="-78"/>
+                <a:ea typeface="Amiri" pitchFamily="2" charset="-78"/>
                 <a:cs typeface="Amiri" pitchFamily="2" charset="-78"/>
               </a:rPr>
               <a:t>يَشْعُرُ</a:t>
@@ -39943,6 +40201,7 @@
                   <a:srgbClr val="D4AF37"/>
                 </a:solidFill>
                 <a:latin typeface="Amiri" pitchFamily="2" charset="-78"/>
+                <a:ea typeface="Amiri" pitchFamily="2" charset="-78"/>
                 <a:cs typeface="Amiri" pitchFamily="2" charset="-78"/>
               </a:rPr>
               <a:t>م</a:t>
@@ -40263,6 +40522,7 @@
                   <a:srgbClr val="8A6D1E"/>
                 </a:solidFill>
                 <a:latin typeface="Amiri" pitchFamily="2" charset="-78"/>
+                <a:ea typeface="Amiri" pitchFamily="2" charset="-78"/>
                 <a:cs typeface="Amiri" pitchFamily="2" charset="-78"/>
               </a:rPr>
               <a:t>فِي الغُرَفِ</a:t>
@@ -41439,6 +41699,7 @@
                   <a:srgbClr val="1B3B6F"/>
                 </a:solidFill>
                 <a:latin typeface="Amiri" pitchFamily="2" charset="-78"/>
+                <a:ea typeface="Amiri" pitchFamily="2" charset="-78"/>
                 <a:cs typeface="Amiri" pitchFamily="2" charset="-78"/>
               </a:rPr>
               <a:t>دَوْرُكَ!</a:t>
@@ -41515,6 +41776,7 @@
                   <a:srgbClr val="1B3B6F"/>
                 </a:solidFill>
                 <a:latin typeface="Amiri" pitchFamily="2" charset="-78"/>
+                <a:ea typeface="Amiri" pitchFamily="2" charset="-78"/>
                 <a:cs typeface="Amiri" pitchFamily="2" charset="-78"/>
               </a:rPr>
               <a:t>أَحْسَنْتَ! / أَحْسَنْتِ!</a:t>
@@ -41591,6 +41853,7 @@
                   <a:srgbClr val="1B3B6F"/>
                 </a:solidFill>
                 <a:latin typeface="Amiri" pitchFamily="2" charset="-78"/>
+                <a:ea typeface="Amiri" pitchFamily="2" charset="-78"/>
                 <a:cs typeface="Amiri" pitchFamily="2" charset="-78"/>
               </a:rPr>
               <a:t>تَكَلَّمْ أَكْثَرَ، مِنْ فَضْلِكَ</a:t>
@@ -41667,6 +41930,7 @@
                   <a:srgbClr val="1B3B6F"/>
                 </a:solidFill>
                 <a:latin typeface="Amiri" pitchFamily="2" charset="-78"/>
+                <a:ea typeface="Amiri" pitchFamily="2" charset="-78"/>
                 <a:cs typeface="Amiri" pitchFamily="2" charset="-78"/>
               </a:rPr>
               <a:t>لِمَاذَا؟</a:t>
@@ -41838,6 +42102,7 @@
                   <a:srgbClr val="D4AF37"/>
                 </a:solidFill>
                 <a:latin typeface="Amiri" pitchFamily="2" charset="-78"/>
+                <a:ea typeface="Amiri" pitchFamily="2" charset="-78"/>
                 <a:cs typeface="Amiri" pitchFamily="2" charset="-78"/>
               </a:rPr>
               <a:t>م</a:t>
@@ -42158,6 +42423,7 @@
                   <a:srgbClr val="8A6D1E"/>
                 </a:solidFill>
                 <a:latin typeface="Amiri" pitchFamily="2" charset="-78"/>
+                <a:ea typeface="Amiri" pitchFamily="2" charset="-78"/>
                 <a:cs typeface="Amiri" pitchFamily="2" charset="-78"/>
               </a:rPr>
               <a:t>أَتَّصِلُ بِالمَدْرَسَةِ</a:t>
@@ -42438,6 +42704,7 @@
                   <a:srgbClr val="1B3B6F"/>
                 </a:solidFill>
                 <a:latin typeface="Amiri" pitchFamily="2" charset="-78"/>
+                <a:ea typeface="Amiri" pitchFamily="2" charset="-78"/>
                 <a:cs typeface="Amiri" pitchFamily="2" charset="-78"/>
               </a:rPr>
               <a:t>أَنَا … فِي الصَّفِّ …</a:t>
@@ -42514,6 +42781,7 @@
                   <a:srgbClr val="1B3B6F"/>
                 </a:solidFill>
                 <a:latin typeface="Amiri" pitchFamily="2" charset="-78"/>
+                <a:ea typeface="Amiri" pitchFamily="2" charset="-78"/>
                 <a:cs typeface="Amiri" pitchFamily="2" charset="-78"/>
               </a:rPr>
               <a:t>مَدْرَسَةُ النُّورِ، صَبَاحُ الخَيْرِ. مَنْ مَعِي؟</a:t>
@@ -42682,6 +42950,7 @@
                   <a:srgbClr val="1B3B6F"/>
                 </a:solidFill>
                 <a:latin typeface="Amiri" pitchFamily="2" charset="-78"/>
+                <a:ea typeface="Amiri" pitchFamily="2" charset="-78"/>
                 <a:cs typeface="Amiri" pitchFamily="2" charset="-78"/>
               </a:rPr>
               <a:t>أَنَا مَرِيضٌ وَلَا أَسْتَطِيعُ …</a:t>
@@ -42758,6 +43027,7 @@
                   <a:srgbClr val="1B3B6F"/>
                 </a:solidFill>
                 <a:latin typeface="Amiri" pitchFamily="2" charset="-78"/>
+                <a:ea typeface="Amiri" pitchFamily="2" charset="-78"/>
                 <a:cs typeface="Amiri" pitchFamily="2" charset="-78"/>
               </a:rPr>
               <a:t>مَا المُشْكِلَةُ؟</a:t>
@@ -42926,6 +43196,7 @@
                   <a:srgbClr val="1B3B6F"/>
                 </a:solidFill>
                 <a:latin typeface="Amiri" pitchFamily="2" charset="-78"/>
+                <a:ea typeface="Amiri" pitchFamily="2" charset="-78"/>
                 <a:cs typeface="Amiri" pitchFamily="2" charset="-78"/>
               </a:rPr>
               <a:t>يُؤْلِمُنِي …</a:t>
@@ -43002,6 +43273,7 @@
                   <a:srgbClr val="1B3B6F"/>
                 </a:solidFill>
                 <a:latin typeface="Amiri" pitchFamily="2" charset="-78"/>
+                <a:ea typeface="Amiri" pitchFamily="2" charset="-78"/>
                 <a:cs typeface="Amiri" pitchFamily="2" charset="-78"/>
               </a:rPr>
               <a:t>مَاذَا يُؤْلِمُكَ؟</a:t>
@@ -43170,6 +43442,7 @@
                   <a:srgbClr val="1B3B6F"/>
                 </a:solidFill>
                 <a:latin typeface="Amiri" pitchFamily="2" charset="-78"/>
+                <a:ea typeface="Amiri" pitchFamily="2" charset="-78"/>
                 <a:cs typeface="Amiri" pitchFamily="2" charset="-78"/>
               </a:rPr>
               <a:t>نَعَمْ، عِنْدِي … وَ…</a:t>
@@ -43246,6 +43519,7 @@
                   <a:srgbClr val="1B3B6F"/>
                 </a:solidFill>
                 <a:latin typeface="Amiri" pitchFamily="2" charset="-78"/>
+                <a:ea typeface="Amiri" pitchFamily="2" charset="-78"/>
                 <a:cs typeface="Amiri" pitchFamily="2" charset="-78"/>
               </a:rPr>
               <a:t>هَلْ عِنْدَكَ حُمَّى؟</a:t>
@@ -43414,6 +43688,7 @@
                   <a:srgbClr val="1B3B6F"/>
                 </a:solidFill>
                 <a:latin typeface="Amiri" pitchFamily="2" charset="-78"/>
+                <a:ea typeface="Amiri" pitchFamily="2" charset="-78"/>
                 <a:cs typeface="Amiri" pitchFamily="2" charset="-78"/>
               </a:rPr>
               <a:t>مُنْذُ …</a:t>
@@ -43490,6 +43765,7 @@
                   <a:srgbClr val="1B3B6F"/>
                 </a:solidFill>
                 <a:latin typeface="Amiri" pitchFamily="2" charset="-78"/>
+                <a:ea typeface="Amiri" pitchFamily="2" charset="-78"/>
                 <a:cs typeface="Amiri" pitchFamily="2" charset="-78"/>
               </a:rPr>
               <a:t>مُنْذُ مَتَى أَنْتَ مَرِيضٌ؟</a:t>
@@ -43764,6 +44040,7 @@
                   <a:srgbClr val="D4AF37"/>
                 </a:solidFill>
                 <a:latin typeface="Amiri" pitchFamily="2" charset="-78"/>
+                <a:ea typeface="Amiri" pitchFamily="2" charset="-78"/>
                 <a:cs typeface="Amiri" pitchFamily="2" charset="-78"/>
               </a:rPr>
               <a:t>م</a:t>
@@ -44084,6 +44361,7 @@
                   <a:srgbClr val="8A6D1E"/>
                 </a:solidFill>
                 <a:latin typeface="Amiri" pitchFamily="2" charset="-78"/>
+                <a:ea typeface="Amiri" pitchFamily="2" charset="-78"/>
                 <a:cs typeface="Amiri" pitchFamily="2" charset="-78"/>
               </a:rPr>
               <a:t>بَعْدَ دَرْسِ الرِّيَاضَةِ</a:t>
@@ -44364,6 +44642,7 @@
                   <a:srgbClr val="1B3B6F"/>
                 </a:solidFill>
                 <a:latin typeface="Amiri" pitchFamily="2" charset="-78"/>
+                <a:ea typeface="Amiri" pitchFamily="2" charset="-78"/>
                 <a:cs typeface="Amiri" pitchFamily="2" charset="-78"/>
               </a:rPr>
               <a:t>وَقَعْتُ فِي …</a:t>
@@ -44440,6 +44719,7 @@
                   <a:srgbClr val="1B3B6F"/>
                 </a:solidFill>
                 <a:latin typeface="Amiri" pitchFamily="2" charset="-78"/>
+                <a:ea typeface="Amiri" pitchFamily="2" charset="-78"/>
                 <a:cs typeface="Amiri" pitchFamily="2" charset="-78"/>
               </a:rPr>
               <a:t>مَاذَا حَدَثَ لَكَ؟</a:t>
@@ -44608,6 +44888,7 @@
                   <a:srgbClr val="1B3B6F"/>
                 </a:solidFill>
                 <a:latin typeface="Amiri" pitchFamily="2" charset="-78"/>
+                <a:ea typeface="Amiri" pitchFamily="2" charset="-78"/>
                 <a:cs typeface="Amiri" pitchFamily="2" charset="-78"/>
               </a:rPr>
               <a:t>تُؤْلِمُنِي …</a:t>
@@ -44684,6 +44965,7 @@
                   <a:srgbClr val="1B3B6F"/>
                 </a:solidFill>
                 <a:latin typeface="Amiri" pitchFamily="2" charset="-78"/>
+                <a:ea typeface="Amiri" pitchFamily="2" charset="-78"/>
                 <a:cs typeface="Amiri" pitchFamily="2" charset="-78"/>
               </a:rPr>
               <a:t>أَيْنَ الأَلَمُ؟</a:t>
@@ -44852,6 +45134,7 @@
                   <a:srgbClr val="1B3B6F"/>
                 </a:solidFill>
                 <a:latin typeface="Amiri" pitchFamily="2" charset="-78"/>
+                <a:ea typeface="Amiri" pitchFamily="2" charset="-78"/>
                 <a:cs typeface="Amiri" pitchFamily="2" charset="-78"/>
               </a:rPr>
               <a:t>أَسْتَطِيعُ … لٰكِنْ …</a:t>
@@ -44928,6 +45211,7 @@
                   <a:srgbClr val="1B3B6F"/>
                 </a:solidFill>
                 <a:latin typeface="Amiri" pitchFamily="2" charset="-78"/>
+                <a:ea typeface="Amiri" pitchFamily="2" charset="-78"/>
                 <a:cs typeface="Amiri" pitchFamily="2" charset="-78"/>
               </a:rPr>
               <a:t>هَلْ تَسْتَطِيعُ أَنْ تَمْشِيَ؟</a:t>
@@ -45031,6 +45315,7 @@
                   <a:srgbClr val="1B3B6F"/>
                 </a:solidFill>
                 <a:latin typeface="Amiri" pitchFamily="2" charset="-78"/>
+                <a:ea typeface="Amiri" pitchFamily="2" charset="-78"/>
                 <a:cs typeface="Amiri" pitchFamily="2" charset="-78"/>
               </a:rPr>
               <a:t>هَلْ يَجِبُ أَنْ …؟</a:t>
@@ -45107,6 +45392,7 @@
                   <a:srgbClr val="1B3B6F"/>
                 </a:solidFill>
                 <a:latin typeface="Amiri" pitchFamily="2" charset="-78"/>
+                <a:ea typeface="Amiri" pitchFamily="2" charset="-78"/>
                 <a:cs typeface="Amiri" pitchFamily="2" charset="-78"/>
               </a:rPr>
               <a:t>… سَأَضَعُ الثَّلْجَ عَلَى رِجْلِكَ.</a:t>
@@ -45210,6 +45496,7 @@
                   <a:srgbClr val="1B3B6F"/>
                 </a:solidFill>
                 <a:latin typeface="Amiri" pitchFamily="2" charset="-78"/>
+                <a:ea typeface="Amiri" pitchFamily="2" charset="-78"/>
                 <a:cs typeface="Amiri" pitchFamily="2" charset="-78"/>
               </a:rPr>
               <a:t>نَعَمْ، مِنْ فَضْلِكِ، اتَّصِلِي بِأُمِّي …</a:t>
@@ -45286,6 +45573,7 @@
                   <a:srgbClr val="1B3B6F"/>
                 </a:solidFill>
                 <a:latin typeface="Amiri" pitchFamily="2" charset="-78"/>
+                <a:ea typeface="Amiri" pitchFamily="2" charset="-78"/>
                 <a:cs typeface="Amiri" pitchFamily="2" charset="-78"/>
               </a:rPr>
               <a:t>هَلْ تُرِيدُ أَنْ أَتَّصِلَ بِأُسْرَتِكَ؟</a:t>
@@ -45460,13 +45748,9 @@
     <a:fontScheme name="Office">
       <a:majorFont>
         <a:latin typeface="Calibri Light" panose="020F0302020204030204"/>
-        <a:ea typeface=""/>
-        <a:cs typeface=""/>
-        <a:font script="Jpan" typeface="游ゴシック Light"/>
-        <a:font script="Hang" typeface="맑은 고딕"/>
-        <a:font script="Hans" typeface="等线 Light"/>
-        <a:font script="Hant" typeface="新細明體"/>
-        <a:font script="Arab" typeface="Times New Roman"/>
+        <a:ea typeface="Amiri" pitchFamily="2" charset="-78"/>
+        <a:cs typeface="Amiri" pitchFamily="2" charset="-78"/>
+        <a:font script="Arab" typeface="Amiri"/>
         <a:font script="Hebr" typeface="Times New Roman"/>
         <a:font script="Thai" typeface="Angsana New"/>
         <a:font script="Ethi" typeface="Nyala"/>
@@ -45512,13 +45796,9 @@
       </a:majorFont>
       <a:minorFont>
         <a:latin typeface="Calibri" panose="020F0502020204030204"/>
-        <a:ea typeface=""/>
-        <a:cs typeface=""/>
-        <a:font script="Jpan" typeface="游ゴシック"/>
-        <a:font script="Hang" typeface="맑은 고딕"/>
-        <a:font script="Hans" typeface="等线"/>
-        <a:font script="Hant" typeface="新細明體"/>
-        <a:font script="Arab" typeface="Arial"/>
+        <a:ea typeface="Amiri" pitchFamily="2" charset="-78"/>
+        <a:cs typeface="Amiri" pitchFamily="2" charset="-78"/>
+        <a:font script="Arab" typeface="Amiri"/>
         <a:font script="Hebr" typeface="Arial"/>
         <a:font script="Thai" typeface="Cordia New"/>
         <a:font script="Ethi" typeface="Nyala"/>
